--- a/docs/洲遊幣Lite_員工手冊_管理版_機密.pptx
+++ b/docs/洲遊幣Lite_員工手冊_管理版_機密.pptx
@@ -15,9 +15,10 @@
     <p:sldId id="263" r:id="rId9"/>
     <p:sldId id="264" r:id="rId10"/>
     <p:sldId id="265" r:id="rId11"/>
+    <p:sldId id="266" r:id="rId12"/>
   </p:sldIdLst>
   <p:notesMasterIdLst>
-    <p:notesMasterId r:id="rId12"/>
+    <p:notesMasterId r:id="rId13"/>
   </p:notesMasterIdLst>
   <p:sldSz cx="9144000" cy="5143500"/>
   <p:notesSz cx="5143500" cy="9144000"/>
@@ -623,6 +624,94 @@
             <a:fld id="{F7021451-1387-4CA6-816F-3879F97B5CBC}" type="slidenum">
               <a:rPr lang="en-US"/>
               <a:t>10</a:t>
+            </a:fld>
+            <a:endParaRPr lang="en-US"/>
+          </a:p>
+        </p:txBody>
+      </p:sp>
+    </p:spTree>
+    <p:extLst>
+      <p:ext uri="{BB962C8B-B14F-4D97-AF65-F5344CB8AC3E}">
+        <p14:creationId xmlns:p14="http://schemas.microsoft.com/office/powerpoint/2010/main" val="1024086991"/>
+      </p:ext>
+    </p:extLst>
+  </p:cSld>
+  <p:clrMapOvr>
+    <a:masterClrMapping/>
+  </p:clrMapOvr>
+</p:notes>
+</file>
+
+<file path=ppt/notesSlides/notesSlide11.xml><?xml version="1.0" encoding="utf-8"?>
+<p:notes xmlns:a="http://schemas.openxmlformats.org/drawingml/2006/main" xmlns:r="http://schemas.openxmlformats.org/officeDocument/2006/relationships" xmlns:p="http://schemas.openxmlformats.org/presentationml/2006/main">
+  <p:cSld>
+    <p:spTree>
+      <p:nvGrpSpPr>
+        <p:cNvPr id="1" name=""/>
+        <p:cNvGrpSpPr/>
+        <p:nvPr/>
+      </p:nvGrpSpPr>
+      <p:grpSpPr>
+        <a:xfrm>
+          <a:off x="0" y="0"/>
+          <a:ext cx="0" cy="0"/>
+          <a:chOff x="0" y="0"/>
+          <a:chExt cx="0" cy="0"/>
+        </a:xfrm>
+      </p:grpSpPr>
+      <p:sp>
+        <p:nvSpPr>
+          <p:cNvPr id="2" name="Slide Image Placeholder 1"/>
+          <p:cNvSpPr>
+            <a:spLocks noGrp="1" noRot="1" noChangeAspect="1"/>
+          </p:cNvSpPr>
+          <p:nvPr>
+            <p:ph type="sldImg"/>
+          </p:nvPr>
+        </p:nvSpPr>
+        <p:spPr/>
+      </p:sp>
+      <p:sp>
+        <p:nvSpPr>
+          <p:cNvPr id="3" name="Notes Placeholder 2"/>
+          <p:cNvSpPr>
+            <a:spLocks noGrp="1"/>
+          </p:cNvSpPr>
+          <p:nvPr>
+            <p:ph type="body" idx="1"/>
+          </p:nvPr>
+        </p:nvSpPr>
+        <p:spPr/>
+        <p:txBody>
+          <a:bodyPr/>
+          <a:lstStyle/>
+          <a:p>
+            <a:r>
+              <a:rPr lang="en-US" dirty="0"/>
+              <a:t/>
+            </a:r>
+            <a:endParaRPr lang="en-US" dirty="0"/>
+          </a:p>
+        </p:txBody>
+      </p:sp>
+      <p:sp>
+        <p:nvSpPr>
+          <p:cNvPr id="4" name="Slide Number Placeholder 3"/>
+          <p:cNvSpPr>
+            <a:spLocks noGrp="1"/>
+          </p:cNvSpPr>
+          <p:nvPr>
+            <p:ph type="sldNum" sz="quarter" idx="10"/>
+          </p:nvPr>
+        </p:nvSpPr>
+        <p:spPr/>
+        <p:txBody>
+          <a:bodyPr/>
+          <a:lstStyle/>
+          <a:p>
+            <a:fld id="{F7021451-1387-4CA6-816F-3879F97B5CBC}" type="slidenum">
+              <a:rPr lang="en-US"/>
+              <a:t>11</a:t>
             </a:fld>
             <a:endParaRPr lang="en-US"/>
           </a:p>
@@ -1978,7 +2067,7 @@
                 <a:ea typeface="Microsoft JhengHei" pitchFamily="34" charset="-122"/>
                 <a:cs typeface="Microsoft JhengHei" pitchFamily="34" charset="-120"/>
               </a:rPr>
-              <a:t>八、上線前檢查清單</a:t>
+              <a:t>七、狀況處理</a:t>
             </a:r>
             <a:endParaRPr lang="en-US" sz="2400" dirty="0"/>
           </a:p>
@@ -2148,6 +2237,1237 @@
           </a:p>
         </p:txBody>
       </p:sp>
+      <p:graphicFrame>
+        <p:nvGraphicFramePr>
+          <p:cNvPr id="11" name="Table 0"/>
+          <p:cNvGraphicFramePr>
+            <a:graphicFrameLocks noGrp="1"/>
+          </p:cNvGraphicFramePr>
+          <p:nvPr>
+            <p:extLst>
+              <p:ext uri="{D42A27DB-BD31-4B8C-83A1-F6EECF244321}">
+                <p14:modId xmlns:p14="http://schemas.microsoft.com/office/powerpoint/2010/main" val="1579011935"/>
+              </p:ext>
+            </p:extLst>
+          </p:nvPr>
+        </p:nvGraphicFramePr>
+        <p:xfrm>
+          <a:off x="502920" y="1371600"/>
+          <a:ext cx="8138160" cy="914400"/>
+        </p:xfrm>
+        <a:graphic>
+          <a:graphicData uri="http://schemas.openxmlformats.org/drawingml/2006/table">
+            <a:tbl>
+              <a:tblPr/>
+              <a:tblGrid>
+                <a:gridCol w="2468880"/>
+                <a:gridCol w="5669280"/>
+              </a:tblGrid>
+              <a:tr h="457200">
+                <a:tc>
+                  <a:txBody>
+                    <a:bodyPr/>
+                    <a:lstStyle/>
+                    <a:p>
+                      <a:pPr indent="0" marL="0">
+                        <a:buNone/>
+                      </a:pPr>
+                      <a:r>
+                        <a:rPr lang="en-US" sz="1100" b="1" dirty="0">
+                          <a:solidFill>
+                            <a:srgbClr val="3D3935"/>
+                          </a:solidFill>
+                          <a:latin typeface="Microsoft JhengHei" pitchFamily="34" charset="0"/>
+                          <a:ea typeface="Microsoft JhengHei" pitchFamily="34" charset="-122"/>
+                          <a:cs typeface="Microsoft JhengHei" pitchFamily="34" charset="-120"/>
+                        </a:rPr>
+                        <a:t>狀況</a:t>
+                      </a:r>
+                      <a:endParaRPr lang="en-US" sz="1100" dirty="0">
+                        <a:latin typeface="Microsoft JhengHei" charset="0"/>
+                        <a:ea typeface="Microsoft JhengHei" charset="0"/>
+                        <a:cs typeface="Microsoft JhengHei" charset="0"/>
+                      </a:endParaRPr>
+                    </a:p>
+                  </a:txBody>
+                  <a:tcPr marL="91440" marR="91440" marT="45720" marB="45720" anchor="ctr">
+                    <a:lnL w="6350" cap="flat" cmpd="sng" algn="ctr">
+                      <a:solidFill>
+                        <a:srgbClr val="DAD9D6"/>
+                      </a:solidFill>
+                      <a:prstDash val="solid"/>
+                      <a:round/>
+                      <a:headEnd type="none" w="med" len="med"/>
+                      <a:tailEnd type="none" w="med" len="med"/>
+                    </a:lnL>
+                    <a:lnR w="6350" cap="flat" cmpd="sng" algn="ctr">
+                      <a:solidFill>
+                        <a:srgbClr val="DAD9D6"/>
+                      </a:solidFill>
+                      <a:prstDash val="solid"/>
+                      <a:round/>
+                      <a:headEnd type="none" w="med" len="med"/>
+                      <a:tailEnd type="none" w="med" len="med"/>
+                    </a:lnR>
+                    <a:lnT w="6350" cap="flat" cmpd="sng" algn="ctr">
+                      <a:solidFill>
+                        <a:srgbClr val="DAD9D6"/>
+                      </a:solidFill>
+                      <a:prstDash val="solid"/>
+                      <a:round/>
+                      <a:headEnd type="none" w="med" len="med"/>
+                      <a:tailEnd type="none" w="med" len="med"/>
+                    </a:lnT>
+                    <a:lnB w="6350" cap="flat" cmpd="sng" algn="ctr">
+                      <a:solidFill>
+                        <a:srgbClr val="DAD9D6"/>
+                      </a:solidFill>
+                      <a:prstDash val="solid"/>
+                      <a:round/>
+                      <a:headEnd type="none" w="med" len="med"/>
+                      <a:tailEnd type="none" w="med" len="med"/>
+                    </a:lnB>
+                    <a:solidFill>
+                      <a:srgbClr val="F4ECE7"/>
+                    </a:solidFill>
+                  </a:tcPr>
+                </a:tc>
+                <a:tc>
+                  <a:txBody>
+                    <a:bodyPr/>
+                    <a:lstStyle/>
+                    <a:p>
+                      <a:pPr indent="0" marL="0">
+                        <a:buNone/>
+                      </a:pPr>
+                      <a:r>
+                        <a:rPr lang="en-US" sz="1100" b="1" dirty="0">
+                          <a:solidFill>
+                            <a:srgbClr val="3D3935"/>
+                          </a:solidFill>
+                          <a:latin typeface="Microsoft JhengHei" pitchFamily="34" charset="0"/>
+                          <a:ea typeface="Microsoft JhengHei" pitchFamily="34" charset="-122"/>
+                          <a:cs typeface="Microsoft JhengHei" pitchFamily="34" charset="-120"/>
+                        </a:rPr>
+                        <a:t>處理</a:t>
+                      </a:r>
+                      <a:endParaRPr lang="en-US" sz="1100" dirty="0">
+                        <a:latin typeface="Microsoft JhengHei" charset="0"/>
+                        <a:ea typeface="Microsoft JhengHei" charset="0"/>
+                        <a:cs typeface="Microsoft JhengHei" charset="0"/>
+                      </a:endParaRPr>
+                    </a:p>
+                  </a:txBody>
+                  <a:tcPr marL="91440" marR="91440" marT="45720" marB="45720" anchor="ctr">
+                    <a:lnL w="6350" cap="flat" cmpd="sng" algn="ctr">
+                      <a:solidFill>
+                        <a:srgbClr val="DAD9D6"/>
+                      </a:solidFill>
+                      <a:prstDash val="solid"/>
+                      <a:round/>
+                      <a:headEnd type="none" w="med" len="med"/>
+                      <a:tailEnd type="none" w="med" len="med"/>
+                    </a:lnL>
+                    <a:lnR w="6350" cap="flat" cmpd="sng" algn="ctr">
+                      <a:solidFill>
+                        <a:srgbClr val="DAD9D6"/>
+                      </a:solidFill>
+                      <a:prstDash val="solid"/>
+                      <a:round/>
+                      <a:headEnd type="none" w="med" len="med"/>
+                      <a:tailEnd type="none" w="med" len="med"/>
+                    </a:lnR>
+                    <a:lnT w="6350" cap="flat" cmpd="sng" algn="ctr">
+                      <a:solidFill>
+                        <a:srgbClr val="DAD9D6"/>
+                      </a:solidFill>
+                      <a:prstDash val="solid"/>
+                      <a:round/>
+                      <a:headEnd type="none" w="med" len="med"/>
+                      <a:tailEnd type="none" w="med" len="med"/>
+                    </a:lnT>
+                    <a:lnB w="6350" cap="flat" cmpd="sng" algn="ctr">
+                      <a:solidFill>
+                        <a:srgbClr val="DAD9D6"/>
+                      </a:solidFill>
+                      <a:prstDash val="solid"/>
+                      <a:round/>
+                      <a:headEnd type="none" w="med" len="med"/>
+                      <a:tailEnd type="none" w="med" len="med"/>
+                    </a:lnB>
+                    <a:solidFill>
+                      <a:srgbClr val="F4ECE7"/>
+                    </a:solidFill>
+                  </a:tcPr>
+                </a:tc>
+              </a:tr>
+              <a:tr h="457200">
+                <a:tc>
+                  <a:txBody>
+                    <a:bodyPr/>
+                    <a:lstStyle/>
+                    <a:p>
+                      <a:pPr indent="0" marL="0">
+                        <a:buNone/>
+                      </a:pPr>
+                      <a:r>
+                        <a:rPr lang="en-US" sz="1100" dirty="0">
+                          <a:solidFill>
+                            <a:srgbClr val="3D3935"/>
+                          </a:solidFill>
+                          <a:latin typeface="Microsoft JhengHei" pitchFamily="34" charset="0"/>
+                          <a:ea typeface="Microsoft JhengHei" pitchFamily="34" charset="-122"/>
+                          <a:cs typeface="Microsoft JhengHei" pitchFamily="34" charset="-120"/>
+                        </a:rPr>
+                        <a:t>客人沒收到券</a:t>
+                      </a:r>
+                      <a:endParaRPr lang="en-US" sz="1100" dirty="0">
+                        <a:latin typeface="Microsoft JhengHei" charset="0"/>
+                        <a:ea typeface="Microsoft JhengHei" charset="0"/>
+                        <a:cs typeface="Microsoft JhengHei" charset="0"/>
+                      </a:endParaRPr>
+                    </a:p>
+                  </a:txBody>
+                  <a:tcPr marL="91440" marR="91440" marT="45720" marB="45720" anchor="ctr">
+                    <a:lnL w="6350" cap="flat" cmpd="sng" algn="ctr">
+                      <a:solidFill>
+                        <a:srgbClr val="DAD9D6"/>
+                      </a:solidFill>
+                      <a:prstDash val="solid"/>
+                      <a:round/>
+                      <a:headEnd type="none" w="med" len="med"/>
+                      <a:tailEnd type="none" w="med" len="med"/>
+                    </a:lnL>
+                    <a:lnR w="6350" cap="flat" cmpd="sng" algn="ctr">
+                      <a:solidFill>
+                        <a:srgbClr val="DAD9D6"/>
+                      </a:solidFill>
+                      <a:prstDash val="solid"/>
+                      <a:round/>
+                      <a:headEnd type="none" w="med" len="med"/>
+                      <a:tailEnd type="none" w="med" len="med"/>
+                    </a:lnR>
+                    <a:lnT w="6350" cap="flat" cmpd="sng" algn="ctr">
+                      <a:solidFill>
+                        <a:srgbClr val="DAD9D6"/>
+                      </a:solidFill>
+                      <a:prstDash val="solid"/>
+                      <a:round/>
+                      <a:headEnd type="none" w="med" len="med"/>
+                      <a:tailEnd type="none" w="med" len="med"/>
+                    </a:lnT>
+                    <a:lnB w="6350" cap="flat" cmpd="sng" algn="ctr">
+                      <a:solidFill>
+                        <a:srgbClr val="DAD9D6"/>
+                      </a:solidFill>
+                      <a:prstDash val="solid"/>
+                      <a:round/>
+                      <a:headEnd type="none" w="med" len="med"/>
+                      <a:tailEnd type="none" w="med" len="med"/>
+                    </a:lnB>
+                    <a:solidFill>
+                      <a:srgbClr val="FFFFFF"/>
+                    </a:solidFill>
+                  </a:tcPr>
+                </a:tc>
+                <a:tc>
+                  <a:txBody>
+                    <a:bodyPr/>
+                    <a:lstStyle/>
+                    <a:p>
+                      <a:pPr indent="0" marL="0">
+                        <a:buNone/>
+                      </a:pPr>
+                      <a:r>
+                        <a:rPr lang="en-US" sz="1100" dirty="0">
+                          <a:solidFill>
+                            <a:srgbClr val="3D3935"/>
+                          </a:solidFill>
+                          <a:latin typeface="Microsoft JhengHei" pitchFamily="34" charset="0"/>
+                          <a:ea typeface="Microsoft JhengHei" pitchFamily="34" charset="-122"/>
+                          <a:cs typeface="Microsoft JhengHei" pitchFamily="34" charset="-120"/>
+                        </a:rPr>
+                        <a:t>中獎名單搜姓名／兌換碼 → 「推播失敗」→ 補送；「券未領取」→ 請他在 LINE 對話往上找</a:t>
+                      </a:r>
+                      <a:endParaRPr lang="en-US" sz="1100" dirty="0">
+                        <a:latin typeface="Microsoft JhengHei" charset="0"/>
+                        <a:ea typeface="Microsoft JhengHei" charset="0"/>
+                        <a:cs typeface="Microsoft JhengHei" charset="0"/>
+                      </a:endParaRPr>
+                    </a:p>
+                  </a:txBody>
+                  <a:tcPr marL="91440" marR="91440" marT="45720" marB="45720" anchor="ctr">
+                    <a:lnL w="6350" cap="flat" cmpd="sng" algn="ctr">
+                      <a:solidFill>
+                        <a:srgbClr val="DAD9D6"/>
+                      </a:solidFill>
+                      <a:prstDash val="solid"/>
+                      <a:round/>
+                      <a:headEnd type="none" w="med" len="med"/>
+                      <a:tailEnd type="none" w="med" len="med"/>
+                    </a:lnL>
+                    <a:lnR w="6350" cap="flat" cmpd="sng" algn="ctr">
+                      <a:solidFill>
+                        <a:srgbClr val="DAD9D6"/>
+                      </a:solidFill>
+                      <a:prstDash val="solid"/>
+                      <a:round/>
+                      <a:headEnd type="none" w="med" len="med"/>
+                      <a:tailEnd type="none" w="med" len="med"/>
+                    </a:lnR>
+                    <a:lnT w="6350" cap="flat" cmpd="sng" algn="ctr">
+                      <a:solidFill>
+                        <a:srgbClr val="DAD9D6"/>
+                      </a:solidFill>
+                      <a:prstDash val="solid"/>
+                      <a:round/>
+                      <a:headEnd type="none" w="med" len="med"/>
+                      <a:tailEnd type="none" w="med" len="med"/>
+                    </a:lnT>
+                    <a:lnB w="6350" cap="flat" cmpd="sng" algn="ctr">
+                      <a:solidFill>
+                        <a:srgbClr val="DAD9D6"/>
+                      </a:solidFill>
+                      <a:prstDash val="solid"/>
+                      <a:round/>
+                      <a:headEnd type="none" w="med" len="med"/>
+                      <a:tailEnd type="none" w="med" len="med"/>
+                    </a:lnB>
+                    <a:solidFill>
+                      <a:srgbClr val="FFFFFF"/>
+                    </a:solidFill>
+                  </a:tcPr>
+                </a:tc>
+              </a:tr>
+              <a:tr h="457200">
+                <a:tc>
+                  <a:txBody>
+                    <a:bodyPr/>
+                    <a:lstStyle/>
+                    <a:p>
+                      <a:pPr indent="0" marL="0">
+                        <a:buNone/>
+                      </a:pPr>
+                      <a:r>
+                        <a:rPr lang="en-US" sz="1100" dirty="0">
+                          <a:solidFill>
+                            <a:srgbClr val="3D3935"/>
+                          </a:solidFill>
+                          <a:latin typeface="Microsoft JhengHei" pitchFamily="34" charset="0"/>
+                          <a:ea typeface="Microsoft JhengHei" pitchFamily="34" charset="-122"/>
+                          <a:cs typeface="Microsoft JhengHei" pitchFamily="34" charset="-120"/>
+                        </a:rPr>
+                        <a:t>客人說券已使用但堅稱沒領</a:t>
+                      </a:r>
+                      <a:endParaRPr lang="en-US" sz="1100" dirty="0">
+                        <a:latin typeface="Microsoft JhengHei" charset="0"/>
+                        <a:ea typeface="Microsoft JhengHei" charset="0"/>
+                        <a:cs typeface="Microsoft JhengHei" charset="0"/>
+                      </a:endParaRPr>
+                    </a:p>
+                  </a:txBody>
+                  <a:tcPr marL="91440" marR="91440" marT="45720" marB="45720" anchor="ctr">
+                    <a:lnL w="6350" cap="flat" cmpd="sng" algn="ctr">
+                      <a:solidFill>
+                        <a:srgbClr val="DAD9D6"/>
+                      </a:solidFill>
+                      <a:prstDash val="solid"/>
+                      <a:round/>
+                      <a:headEnd type="none" w="med" len="med"/>
+                      <a:tailEnd type="none" w="med" len="med"/>
+                    </a:lnL>
+                    <a:lnR w="6350" cap="flat" cmpd="sng" algn="ctr">
+                      <a:solidFill>
+                        <a:srgbClr val="DAD9D6"/>
+                      </a:solidFill>
+                      <a:prstDash val="solid"/>
+                      <a:round/>
+                      <a:headEnd type="none" w="med" len="med"/>
+                      <a:tailEnd type="none" w="med" len="med"/>
+                    </a:lnR>
+                    <a:lnT w="6350" cap="flat" cmpd="sng" algn="ctr">
+                      <a:solidFill>
+                        <a:srgbClr val="DAD9D6"/>
+                      </a:solidFill>
+                      <a:prstDash val="solid"/>
+                      <a:round/>
+                      <a:headEnd type="none" w="med" len="med"/>
+                      <a:tailEnd type="none" w="med" len="med"/>
+                    </a:lnT>
+                    <a:lnB w="6350" cap="flat" cmpd="sng" algn="ctr">
+                      <a:solidFill>
+                        <a:srgbClr val="DAD9D6"/>
+                      </a:solidFill>
+                      <a:prstDash val="solid"/>
+                      <a:round/>
+                      <a:headEnd type="none" w="med" len="med"/>
+                      <a:tailEnd type="none" w="med" len="med"/>
+                    </a:lnB>
+                    <a:solidFill>
+                      <a:srgbClr val="FFFFFF"/>
+                    </a:solidFill>
+                  </a:tcPr>
+                </a:tc>
+                <a:tc>
+                  <a:txBody>
+                    <a:bodyPr/>
+                    <a:lstStyle/>
+                    <a:p>
+                      <a:pPr indent="0" marL="0">
+                        <a:buNone/>
+                      </a:pPr>
+                      <a:r>
+                        <a:rPr lang="en-US" sz="1100" dirty="0">
+                          <a:solidFill>
+                            <a:srgbClr val="3D3935"/>
+                          </a:solidFill>
+                          <a:latin typeface="Microsoft JhengHei" pitchFamily="34" charset="0"/>
+                          <a:ea typeface="Microsoft JhengHei" pitchFamily="34" charset="-122"/>
+                          <a:cs typeface="Microsoft JhengHei" pitchFamily="34" charset="-120"/>
+                        </a:rPr>
+                        <a:t>查 claim_used_at 時間。為防無限領取，每張券只能領一次</a:t>
+                      </a:r>
+                      <a:endParaRPr lang="en-US" sz="1100" dirty="0">
+                        <a:latin typeface="Microsoft JhengHei" charset="0"/>
+                        <a:ea typeface="Microsoft JhengHei" charset="0"/>
+                        <a:cs typeface="Microsoft JhengHei" charset="0"/>
+                      </a:endParaRPr>
+                    </a:p>
+                  </a:txBody>
+                  <a:tcPr marL="91440" marR="91440" marT="45720" marB="45720" anchor="ctr">
+                    <a:lnL w="6350" cap="flat" cmpd="sng" algn="ctr">
+                      <a:solidFill>
+                        <a:srgbClr val="DAD9D6"/>
+                      </a:solidFill>
+                      <a:prstDash val="solid"/>
+                      <a:round/>
+                      <a:headEnd type="none" w="med" len="med"/>
+                      <a:tailEnd type="none" w="med" len="med"/>
+                    </a:lnL>
+                    <a:lnR w="6350" cap="flat" cmpd="sng" algn="ctr">
+                      <a:solidFill>
+                        <a:srgbClr val="DAD9D6"/>
+                      </a:solidFill>
+                      <a:prstDash val="solid"/>
+                      <a:round/>
+                      <a:headEnd type="none" w="med" len="med"/>
+                      <a:tailEnd type="none" w="med" len="med"/>
+                    </a:lnR>
+                    <a:lnT w="6350" cap="flat" cmpd="sng" algn="ctr">
+                      <a:solidFill>
+                        <a:srgbClr val="DAD9D6"/>
+                      </a:solidFill>
+                      <a:prstDash val="solid"/>
+                      <a:round/>
+                      <a:headEnd type="none" w="med" len="med"/>
+                      <a:tailEnd type="none" w="med" len="med"/>
+                    </a:lnT>
+                    <a:lnB w="6350" cap="flat" cmpd="sng" algn="ctr">
+                      <a:solidFill>
+                        <a:srgbClr val="DAD9D6"/>
+                      </a:solidFill>
+                      <a:prstDash val="solid"/>
+                      <a:round/>
+                      <a:headEnd type="none" w="med" len="med"/>
+                      <a:tailEnd type="none" w="med" len="med"/>
+                    </a:lnB>
+                    <a:solidFill>
+                      <a:srgbClr val="FFFFFF"/>
+                    </a:solidFill>
+                  </a:tcPr>
+                </a:tc>
+              </a:tr>
+              <a:tr h="457200">
+                <a:tc>
+                  <a:txBody>
+                    <a:bodyPr/>
+                    <a:lstStyle/>
+                    <a:p>
+                      <a:pPr indent="0" marL="0">
+                        <a:buNone/>
+                      </a:pPr>
+                      <a:r>
+                        <a:rPr lang="en-US" sz="1100" dirty="0">
+                          <a:solidFill>
+                            <a:srgbClr val="3D3935"/>
+                          </a:solidFill>
+                          <a:latin typeface="Microsoft JhengHei" pitchFamily="34" charset="0"/>
+                          <a:ea typeface="Microsoft JhengHei" pitchFamily="34" charset="-122"/>
+                          <a:cs typeface="Microsoft JhengHei" pitchFamily="34" charset="-120"/>
+                        </a:rPr>
+                        <a:t>中獎者遲遲沒填聯絡資訊</a:t>
+                      </a:r>
+                      <a:endParaRPr lang="en-US" sz="1100" dirty="0">
+                        <a:latin typeface="Microsoft JhengHei" charset="0"/>
+                        <a:ea typeface="Microsoft JhengHei" charset="0"/>
+                        <a:cs typeface="Microsoft JhengHei" charset="0"/>
+                      </a:endParaRPr>
+                    </a:p>
+                  </a:txBody>
+                  <a:tcPr marL="91440" marR="91440" marT="45720" marB="45720" anchor="ctr">
+                    <a:lnL w="6350" cap="flat" cmpd="sng" algn="ctr">
+                      <a:solidFill>
+                        <a:srgbClr val="DAD9D6"/>
+                      </a:solidFill>
+                      <a:prstDash val="solid"/>
+                      <a:round/>
+                      <a:headEnd type="none" w="med" len="med"/>
+                      <a:tailEnd type="none" w="med" len="med"/>
+                    </a:lnL>
+                    <a:lnR w="6350" cap="flat" cmpd="sng" algn="ctr">
+                      <a:solidFill>
+                        <a:srgbClr val="DAD9D6"/>
+                      </a:solidFill>
+                      <a:prstDash val="solid"/>
+                      <a:round/>
+                      <a:headEnd type="none" w="med" len="med"/>
+                      <a:tailEnd type="none" w="med" len="med"/>
+                    </a:lnR>
+                    <a:lnT w="6350" cap="flat" cmpd="sng" algn="ctr">
+                      <a:solidFill>
+                        <a:srgbClr val="DAD9D6"/>
+                      </a:solidFill>
+                      <a:prstDash val="solid"/>
+                      <a:round/>
+                      <a:headEnd type="none" w="med" len="med"/>
+                      <a:tailEnd type="none" w="med" len="med"/>
+                    </a:lnT>
+                    <a:lnB w="6350" cap="flat" cmpd="sng" algn="ctr">
+                      <a:solidFill>
+                        <a:srgbClr val="DAD9D6"/>
+                      </a:solidFill>
+                      <a:prstDash val="solid"/>
+                      <a:round/>
+                      <a:headEnd type="none" w="med" len="med"/>
+                      <a:tailEnd type="none" w="med" len="med"/>
+                    </a:lnB>
+                    <a:solidFill>
+                      <a:srgbClr val="FFFFFF"/>
+                    </a:solidFill>
+                  </a:tcPr>
+                </a:tc>
+                <a:tc>
+                  <a:txBody>
+                    <a:bodyPr/>
+                    <a:lstStyle/>
+                    <a:p>
+                      <a:pPr indent="0" marL="0">
+                        <a:buNone/>
+                      </a:pPr>
+                      <a:r>
+                        <a:rPr lang="en-US" sz="1100" dirty="0">
+                          <a:solidFill>
+                            <a:srgbClr val="3D3935"/>
+                          </a:solidFill>
+                          <a:latin typeface="Microsoft JhengHei" pitchFamily="34" charset="0"/>
+                          <a:ea typeface="Microsoft JhengHei" pitchFamily="34" charset="-122"/>
+                          <a:cs typeface="Microsoft JhengHei" pitchFamily="34" charset="-120"/>
+                        </a:rPr>
+                        <a:t>不用人工催，系統會在他下次開遊戲時自動再問</a:t>
+                      </a:r>
+                      <a:endParaRPr lang="en-US" sz="1100" dirty="0">
+                        <a:latin typeface="Microsoft JhengHei" charset="0"/>
+                        <a:ea typeface="Microsoft JhengHei" charset="0"/>
+                        <a:cs typeface="Microsoft JhengHei" charset="0"/>
+                      </a:endParaRPr>
+                    </a:p>
+                  </a:txBody>
+                  <a:tcPr marL="91440" marR="91440" marT="45720" marB="45720" anchor="ctr">
+                    <a:lnL w="6350" cap="flat" cmpd="sng" algn="ctr">
+                      <a:solidFill>
+                        <a:srgbClr val="DAD9D6"/>
+                      </a:solidFill>
+                      <a:prstDash val="solid"/>
+                      <a:round/>
+                      <a:headEnd type="none" w="med" len="med"/>
+                      <a:tailEnd type="none" w="med" len="med"/>
+                    </a:lnL>
+                    <a:lnR w="6350" cap="flat" cmpd="sng" algn="ctr">
+                      <a:solidFill>
+                        <a:srgbClr val="DAD9D6"/>
+                      </a:solidFill>
+                      <a:prstDash val="solid"/>
+                      <a:round/>
+                      <a:headEnd type="none" w="med" len="med"/>
+                      <a:tailEnd type="none" w="med" len="med"/>
+                    </a:lnR>
+                    <a:lnT w="6350" cap="flat" cmpd="sng" algn="ctr">
+                      <a:solidFill>
+                        <a:srgbClr val="DAD9D6"/>
+                      </a:solidFill>
+                      <a:prstDash val="solid"/>
+                      <a:round/>
+                      <a:headEnd type="none" w="med" len="med"/>
+                      <a:tailEnd type="none" w="med" len="med"/>
+                    </a:lnT>
+                    <a:lnB w="6350" cap="flat" cmpd="sng" algn="ctr">
+                      <a:solidFill>
+                        <a:srgbClr val="DAD9D6"/>
+                      </a:solidFill>
+                      <a:prstDash val="solid"/>
+                      <a:round/>
+                      <a:headEnd type="none" w="med" len="med"/>
+                      <a:tailEnd type="none" w="med" len="med"/>
+                    </a:lnB>
+                    <a:solidFill>
+                      <a:srgbClr val="FFFFFF"/>
+                    </a:solidFill>
+                  </a:tcPr>
+                </a:tc>
+              </a:tr>
+              <a:tr h="457200">
+                <a:tc>
+                  <a:txBody>
+                    <a:bodyPr/>
+                    <a:lstStyle/>
+                    <a:p>
+                      <a:pPr indent="0" marL="0">
+                        <a:buNone/>
+                      </a:pPr>
+                      <a:r>
+                        <a:rPr lang="en-US" sz="1100" dirty="0">
+                          <a:solidFill>
+                            <a:srgbClr val="3D3935"/>
+                          </a:solidFill>
+                          <a:latin typeface="Microsoft JhengHei" pitchFamily="34" charset="0"/>
+                          <a:ea typeface="Microsoft JhengHei" pitchFamily="34" charset="-122"/>
+                          <a:cs typeface="Microsoft JhengHei" pitchFamily="34" charset="-120"/>
+                        </a:rPr>
+                        <a:t>某等級獎品發完</a:t>
+                      </a:r>
+                      <a:endParaRPr lang="en-US" sz="1100" dirty="0">
+                        <a:latin typeface="Microsoft JhengHei" charset="0"/>
+                        <a:ea typeface="Microsoft JhengHei" charset="0"/>
+                        <a:cs typeface="Microsoft JhengHei" charset="0"/>
+                      </a:endParaRPr>
+                    </a:p>
+                  </a:txBody>
+                  <a:tcPr marL="91440" marR="91440" marT="45720" marB="45720" anchor="ctr">
+                    <a:lnL w="6350" cap="flat" cmpd="sng" algn="ctr">
+                      <a:solidFill>
+                        <a:srgbClr val="DAD9D6"/>
+                      </a:solidFill>
+                      <a:prstDash val="solid"/>
+                      <a:round/>
+                      <a:headEnd type="none" w="med" len="med"/>
+                      <a:tailEnd type="none" w="med" len="med"/>
+                    </a:lnL>
+                    <a:lnR w="6350" cap="flat" cmpd="sng" algn="ctr">
+                      <a:solidFill>
+                        <a:srgbClr val="DAD9D6"/>
+                      </a:solidFill>
+                      <a:prstDash val="solid"/>
+                      <a:round/>
+                      <a:headEnd type="none" w="med" len="med"/>
+                      <a:tailEnd type="none" w="med" len="med"/>
+                    </a:lnR>
+                    <a:lnT w="6350" cap="flat" cmpd="sng" algn="ctr">
+                      <a:solidFill>
+                        <a:srgbClr val="DAD9D6"/>
+                      </a:solidFill>
+                      <a:prstDash val="solid"/>
+                      <a:round/>
+                      <a:headEnd type="none" w="med" len="med"/>
+                      <a:tailEnd type="none" w="med" len="med"/>
+                    </a:lnT>
+                    <a:lnB w="6350" cap="flat" cmpd="sng" algn="ctr">
+                      <a:solidFill>
+                        <a:srgbClr val="DAD9D6"/>
+                      </a:solidFill>
+                      <a:prstDash val="solid"/>
+                      <a:round/>
+                      <a:headEnd type="none" w="med" len="med"/>
+                      <a:tailEnd type="none" w="med" len="med"/>
+                    </a:lnB>
+                    <a:solidFill>
+                      <a:srgbClr val="FFFFFF"/>
+                    </a:solidFill>
+                  </a:tcPr>
+                </a:tc>
+                <a:tc>
+                  <a:txBody>
+                    <a:bodyPr/>
+                    <a:lstStyle/>
+                    <a:p>
+                      <a:pPr indent="0" marL="0">
+                        <a:buNone/>
+                      </a:pPr>
+                      <a:r>
+                        <a:rPr lang="en-US" sz="1100" dirty="0">
+                          <a:solidFill>
+                            <a:srgbClr val="3D3935"/>
+                          </a:solidFill>
+                          <a:latin typeface="Microsoft JhengHei" pitchFamily="34" charset="0"/>
+                          <a:ea typeface="Microsoft JhengHei" pitchFamily="34" charset="-122"/>
+                          <a:cs typeface="Microsoft JhengHei" pitchFamily="34" charset="-120"/>
+                        </a:rPr>
+                        <a:t>客人會抽到銘謝惠顧且不扣幣。要繼續發獎需增加名額</a:t>
+                      </a:r>
+                      <a:endParaRPr lang="en-US" sz="1100" dirty="0">
+                        <a:latin typeface="Microsoft JhengHei" charset="0"/>
+                        <a:ea typeface="Microsoft JhengHei" charset="0"/>
+                        <a:cs typeface="Microsoft JhengHei" charset="0"/>
+                      </a:endParaRPr>
+                    </a:p>
+                  </a:txBody>
+                  <a:tcPr marL="91440" marR="91440" marT="45720" marB="45720" anchor="ctr">
+                    <a:lnL w="6350" cap="flat" cmpd="sng" algn="ctr">
+                      <a:solidFill>
+                        <a:srgbClr val="DAD9D6"/>
+                      </a:solidFill>
+                      <a:prstDash val="solid"/>
+                      <a:round/>
+                      <a:headEnd type="none" w="med" len="med"/>
+                      <a:tailEnd type="none" w="med" len="med"/>
+                    </a:lnL>
+                    <a:lnR w="6350" cap="flat" cmpd="sng" algn="ctr">
+                      <a:solidFill>
+                        <a:srgbClr val="DAD9D6"/>
+                      </a:solidFill>
+                      <a:prstDash val="solid"/>
+                      <a:round/>
+                      <a:headEnd type="none" w="med" len="med"/>
+                      <a:tailEnd type="none" w="med" len="med"/>
+                    </a:lnR>
+                    <a:lnT w="6350" cap="flat" cmpd="sng" algn="ctr">
+                      <a:solidFill>
+                        <a:srgbClr val="DAD9D6"/>
+                      </a:solidFill>
+                      <a:prstDash val="solid"/>
+                      <a:round/>
+                      <a:headEnd type="none" w="med" len="med"/>
+                      <a:tailEnd type="none" w="med" len="med"/>
+                    </a:lnT>
+                    <a:lnB w="6350" cap="flat" cmpd="sng" algn="ctr">
+                      <a:solidFill>
+                        <a:srgbClr val="DAD9D6"/>
+                      </a:solidFill>
+                      <a:prstDash val="solid"/>
+                      <a:round/>
+                      <a:headEnd type="none" w="med" len="med"/>
+                      <a:tailEnd type="none" w="med" len="med"/>
+                    </a:lnB>
+                    <a:solidFill>
+                      <a:srgbClr val="FFFFFF"/>
+                    </a:solidFill>
+                  </a:tcPr>
+                </a:tc>
+              </a:tr>
+              <a:tr h="457200">
+                <a:tc>
+                  <a:txBody>
+                    <a:bodyPr/>
+                    <a:lstStyle/>
+                    <a:p>
+                      <a:pPr indent="0" marL="0">
+                        <a:buNone/>
+                      </a:pPr>
+                      <a:r>
+                        <a:rPr lang="en-US" sz="1100" dirty="0">
+                          <a:solidFill>
+                            <a:srgbClr val="3D3935"/>
+                          </a:solidFill>
+                          <a:latin typeface="Microsoft JhengHei" pitchFamily="34" charset="0"/>
+                          <a:ea typeface="Microsoft JhengHei" pitchFamily="34" charset="-122"/>
+                          <a:cs typeface="Microsoft JhengHei" pitchFamily="34" charset="-120"/>
+                        </a:rPr>
+                        <a:t>懷疑異常大量中獎</a:t>
+                      </a:r>
+                      <a:endParaRPr lang="en-US" sz="1100" dirty="0">
+                        <a:latin typeface="Microsoft JhengHei" charset="0"/>
+                        <a:ea typeface="Microsoft JhengHei" charset="0"/>
+                        <a:cs typeface="Microsoft JhengHei" charset="0"/>
+                      </a:endParaRPr>
+                    </a:p>
+                  </a:txBody>
+                  <a:tcPr marL="91440" marR="91440" marT="45720" marB="45720" anchor="ctr">
+                    <a:lnL w="6350" cap="flat" cmpd="sng" algn="ctr">
+                      <a:solidFill>
+                        <a:srgbClr val="DAD9D6"/>
+                      </a:solidFill>
+                      <a:prstDash val="solid"/>
+                      <a:round/>
+                      <a:headEnd type="none" w="med" len="med"/>
+                      <a:tailEnd type="none" w="med" len="med"/>
+                    </a:lnL>
+                    <a:lnR w="6350" cap="flat" cmpd="sng" algn="ctr">
+                      <a:solidFill>
+                        <a:srgbClr val="DAD9D6"/>
+                      </a:solidFill>
+                      <a:prstDash val="solid"/>
+                      <a:round/>
+                      <a:headEnd type="none" w="med" len="med"/>
+                      <a:tailEnd type="none" w="med" len="med"/>
+                    </a:lnR>
+                    <a:lnT w="6350" cap="flat" cmpd="sng" algn="ctr">
+                      <a:solidFill>
+                        <a:srgbClr val="DAD9D6"/>
+                      </a:solidFill>
+                      <a:prstDash val="solid"/>
+                      <a:round/>
+                      <a:headEnd type="none" w="med" len="med"/>
+                      <a:tailEnd type="none" w="med" len="med"/>
+                    </a:lnT>
+                    <a:lnB w="6350" cap="flat" cmpd="sng" algn="ctr">
+                      <a:solidFill>
+                        <a:srgbClr val="DAD9D6"/>
+                      </a:solidFill>
+                      <a:prstDash val="solid"/>
+                      <a:round/>
+                      <a:headEnd type="none" w="med" len="med"/>
+                      <a:tailEnd type="none" w="med" len="med"/>
+                    </a:lnB>
+                    <a:solidFill>
+                      <a:srgbClr val="FFFFFF"/>
+                    </a:solidFill>
+                  </a:tcPr>
+                </a:tc>
+                <a:tc>
+                  <a:txBody>
+                    <a:bodyPr/>
+                    <a:lstStyle/>
+                    <a:p>
+                      <a:pPr indent="0" marL="0">
+                        <a:buNone/>
+                      </a:pPr>
+                      <a:r>
+                        <a:rPr lang="en-US" sz="1100" dirty="0">
+                          <a:solidFill>
+                            <a:srgbClr val="3D3935"/>
+                          </a:solidFill>
+                          <a:latin typeface="Microsoft JhengHei" pitchFamily="34" charset="0"/>
+                          <a:ea typeface="Microsoft JhengHei" pitchFamily="34" charset="-122"/>
+                          <a:cs typeface="Microsoft JhengHei" pitchFamily="34" charset="-120"/>
+                        </a:rPr>
+                        <a:t>查同一 LINE UserId 的中獎筆數。洲遊幣每人上限 8 枚，正常不會異常</a:t>
+                      </a:r>
+                      <a:endParaRPr lang="en-US" sz="1100" dirty="0">
+                        <a:latin typeface="Microsoft JhengHei" charset="0"/>
+                        <a:ea typeface="Microsoft JhengHei" charset="0"/>
+                        <a:cs typeface="Microsoft JhengHei" charset="0"/>
+                      </a:endParaRPr>
+                    </a:p>
+                  </a:txBody>
+                  <a:tcPr marL="91440" marR="91440" marT="45720" marB="45720" anchor="ctr">
+                    <a:lnL w="6350" cap="flat" cmpd="sng" algn="ctr">
+                      <a:solidFill>
+                        <a:srgbClr val="DAD9D6"/>
+                      </a:solidFill>
+                      <a:prstDash val="solid"/>
+                      <a:round/>
+                      <a:headEnd type="none" w="med" len="med"/>
+                      <a:tailEnd type="none" w="med" len="med"/>
+                    </a:lnL>
+                    <a:lnR w="6350" cap="flat" cmpd="sng" algn="ctr">
+                      <a:solidFill>
+                        <a:srgbClr val="DAD9D6"/>
+                      </a:solidFill>
+                      <a:prstDash val="solid"/>
+                      <a:round/>
+                      <a:headEnd type="none" w="med" len="med"/>
+                      <a:tailEnd type="none" w="med" len="med"/>
+                    </a:lnR>
+                    <a:lnT w="6350" cap="flat" cmpd="sng" algn="ctr">
+                      <a:solidFill>
+                        <a:srgbClr val="DAD9D6"/>
+                      </a:solidFill>
+                      <a:prstDash val="solid"/>
+                      <a:round/>
+                      <a:headEnd type="none" w="med" len="med"/>
+                      <a:tailEnd type="none" w="med" len="med"/>
+                    </a:lnT>
+                    <a:lnB w="6350" cap="flat" cmpd="sng" algn="ctr">
+                      <a:solidFill>
+                        <a:srgbClr val="DAD9D6"/>
+                      </a:solidFill>
+                      <a:prstDash val="solid"/>
+                      <a:round/>
+                      <a:headEnd type="none" w="med" len="med"/>
+                      <a:tailEnd type="none" w="med" len="med"/>
+                    </a:lnB>
+                    <a:solidFill>
+                      <a:srgbClr val="FFFFFF"/>
+                    </a:solidFill>
+                  </a:tcPr>
+                </a:tc>
+              </a:tr>
+              <a:tr h="457200">
+                <a:tc>
+                  <a:txBody>
+                    <a:bodyPr/>
+                    <a:lstStyle/>
+                    <a:p>
+                      <a:pPr indent="0" marL="0">
+                        <a:buNone/>
+                      </a:pPr>
+                      <a:r>
+                        <a:rPr lang="en-US" sz="1100" dirty="0">
+                          <a:solidFill>
+                            <a:srgbClr val="3D3935"/>
+                          </a:solidFill>
+                          <a:latin typeface="Microsoft JhengHei" pitchFamily="34" charset="0"/>
+                          <a:ea typeface="Microsoft JhengHei" pitchFamily="34" charset="-122"/>
+                          <a:cs typeface="Microsoft JhengHei" pitchFamily="34" charset="-120"/>
+                        </a:rPr>
+                        <a:t>系統整體異常</a:t>
+                      </a:r>
+                      <a:endParaRPr lang="en-US" sz="1100" dirty="0">
+                        <a:latin typeface="Microsoft JhengHei" charset="0"/>
+                        <a:ea typeface="Microsoft JhengHei" charset="0"/>
+                        <a:cs typeface="Microsoft JhengHei" charset="0"/>
+                      </a:endParaRPr>
+                    </a:p>
+                  </a:txBody>
+                  <a:tcPr marL="91440" marR="91440" marT="45720" marB="45720" anchor="ctr">
+                    <a:lnL w="6350" cap="flat" cmpd="sng" algn="ctr">
+                      <a:solidFill>
+                        <a:srgbClr val="DAD9D6"/>
+                      </a:solidFill>
+                      <a:prstDash val="solid"/>
+                      <a:round/>
+                      <a:headEnd type="none" w="med" len="med"/>
+                      <a:tailEnd type="none" w="med" len="med"/>
+                    </a:lnL>
+                    <a:lnR w="6350" cap="flat" cmpd="sng" algn="ctr">
+                      <a:solidFill>
+                        <a:srgbClr val="DAD9D6"/>
+                      </a:solidFill>
+                      <a:prstDash val="solid"/>
+                      <a:round/>
+                      <a:headEnd type="none" w="med" len="med"/>
+                      <a:tailEnd type="none" w="med" len="med"/>
+                    </a:lnR>
+                    <a:lnT w="6350" cap="flat" cmpd="sng" algn="ctr">
+                      <a:solidFill>
+                        <a:srgbClr val="DAD9D6"/>
+                      </a:solidFill>
+                      <a:prstDash val="solid"/>
+                      <a:round/>
+                      <a:headEnd type="none" w="med" len="med"/>
+                      <a:tailEnd type="none" w="med" len="med"/>
+                    </a:lnT>
+                    <a:lnB w="6350" cap="flat" cmpd="sng" algn="ctr">
+                      <a:solidFill>
+                        <a:srgbClr val="DAD9D6"/>
+                      </a:solidFill>
+                      <a:prstDash val="solid"/>
+                      <a:round/>
+                      <a:headEnd type="none" w="med" len="med"/>
+                      <a:tailEnd type="none" w="med" len="med"/>
+                    </a:lnB>
+                    <a:solidFill>
+                      <a:srgbClr val="FFFFFF"/>
+                    </a:solidFill>
+                  </a:tcPr>
+                </a:tc>
+                <a:tc>
+                  <a:txBody>
+                    <a:bodyPr/>
+                    <a:lstStyle/>
+                    <a:p>
+                      <a:pPr indent="0" marL="0">
+                        <a:buNone/>
+                      </a:pPr>
+                      <a:r>
+                        <a:rPr lang="en-US" sz="1100" dirty="0">
+                          <a:solidFill>
+                            <a:srgbClr val="3D3935"/>
+                          </a:solidFill>
+                          <a:latin typeface="Microsoft JhengHei" pitchFamily="34" charset="0"/>
+                          <a:ea typeface="Microsoft JhengHei" pitchFamily="34" charset="-122"/>
+                          <a:cs typeface="Microsoft JhengHei" pitchFamily="34" charset="-120"/>
+                        </a:rPr>
+                        <a:t>打 /api/health?deep=1 看 db 與 LINE token 是否有效</a:t>
+                      </a:r>
+                      <a:endParaRPr lang="en-US" sz="1100" dirty="0">
+                        <a:latin typeface="Microsoft JhengHei" charset="0"/>
+                        <a:ea typeface="Microsoft JhengHei" charset="0"/>
+                        <a:cs typeface="Microsoft JhengHei" charset="0"/>
+                      </a:endParaRPr>
+                    </a:p>
+                  </a:txBody>
+                  <a:tcPr marL="91440" marR="91440" marT="45720" marB="45720" anchor="ctr">
+                    <a:lnL w="6350" cap="flat" cmpd="sng" algn="ctr">
+                      <a:solidFill>
+                        <a:srgbClr val="DAD9D6"/>
+                      </a:solidFill>
+                      <a:prstDash val="solid"/>
+                      <a:round/>
+                      <a:headEnd type="none" w="med" len="med"/>
+                      <a:tailEnd type="none" w="med" len="med"/>
+                    </a:lnL>
+                    <a:lnR w="6350" cap="flat" cmpd="sng" algn="ctr">
+                      <a:solidFill>
+                        <a:srgbClr val="DAD9D6"/>
+                      </a:solidFill>
+                      <a:prstDash val="solid"/>
+                      <a:round/>
+                      <a:headEnd type="none" w="med" len="med"/>
+                      <a:tailEnd type="none" w="med" len="med"/>
+                    </a:lnR>
+                    <a:lnT w="6350" cap="flat" cmpd="sng" algn="ctr">
+                      <a:solidFill>
+                        <a:srgbClr val="DAD9D6"/>
+                      </a:solidFill>
+                      <a:prstDash val="solid"/>
+                      <a:round/>
+                      <a:headEnd type="none" w="med" len="med"/>
+                      <a:tailEnd type="none" w="med" len="med"/>
+                    </a:lnT>
+                    <a:lnB w="6350" cap="flat" cmpd="sng" algn="ctr">
+                      <a:solidFill>
+                        <a:srgbClr val="DAD9D6"/>
+                      </a:solidFill>
+                      <a:prstDash val="solid"/>
+                      <a:round/>
+                      <a:headEnd type="none" w="med" len="med"/>
+                      <a:tailEnd type="none" w="med" len="med"/>
+                    </a:lnB>
+                    <a:solidFill>
+                      <a:srgbClr val="FFFFFF"/>
+                    </a:solidFill>
+                  </a:tcPr>
+                </a:tc>
+              </a:tr>
+            </a:tbl>
+          </a:graphicData>
+        </a:graphic>
+      </p:graphicFrame>
+    </p:spTree>
+  </p:cSld>
+  <p:clrMapOvr>
+    <a:masterClrMapping/>
+  </p:clrMapOvr>
+</p:sld>
+</file>
+
+<file path=ppt/slides/slide11.xml><?xml version="1.0" encoding="utf-8"?>
+<p:sld xmlns:a="http://schemas.openxmlformats.org/drawingml/2006/main" xmlns:r="http://schemas.openxmlformats.org/officeDocument/2006/relationships" xmlns:p="http://schemas.openxmlformats.org/presentationml/2006/main">
+  <p:cSld name="Slide 11">
+    <p:bg>
+      <p:bgPr>
+        <a:solidFill>
+          <a:srgbClr val="FAF8F6"/>
+        </a:solidFill>
+      </p:bgPr>
+    </p:bg>
+    <p:spTree>
+      <p:nvGrpSpPr>
+        <p:cNvPr id="1" name=""/>
+        <p:cNvGrpSpPr/>
+        <p:nvPr/>
+      </p:nvGrpSpPr>
+      <p:grpSpPr>
+        <a:xfrm>
+          <a:off x="0" y="0"/>
+          <a:ext cx="0" cy="0"/>
+          <a:chOff x="0" y="0"/>
+          <a:chExt cx="0" cy="0"/>
+        </a:xfrm>
+      </p:grpSpPr>
+      <p:sp>
+        <p:nvSpPr>
+          <p:cNvPr id="2" name="Text 0"/>
+          <p:cNvSpPr/>
+          <p:nvPr/>
+        </p:nvSpPr>
+        <p:spPr>
+          <a:xfrm>
+            <a:off x="502920" y="310896"/>
+            <a:ext cx="6949440" cy="457200"/>
+          </a:xfrm>
+          <a:prstGeom prst="rect">
+            <a:avLst/>
+          </a:prstGeom>
+          <a:noFill/>
+          <a:ln/>
+        </p:spPr>
+        <p:txBody>
+          <a:bodyPr wrap="square" rtlCol="0" anchor="ctr"/>
+          <a:lstStyle/>
+          <a:p>
+            <a:pPr indent="0" marL="0">
+              <a:buNone/>
+            </a:pPr>
+            <a:r>
+              <a:rPr lang="en-US" sz="2400" b="1" dirty="0">
+                <a:solidFill>
+                  <a:srgbClr val="3D3935"/>
+                </a:solidFill>
+                <a:latin typeface="Microsoft JhengHei" pitchFamily="34" charset="0"/>
+                <a:ea typeface="Microsoft JhengHei" pitchFamily="34" charset="-122"/>
+                <a:cs typeface="Microsoft JhengHei" pitchFamily="34" charset="-120"/>
+              </a:rPr>
+              <a:t>八、上線前檢查清單</a:t>
+            </a:r>
+            <a:endParaRPr lang="en-US" sz="2400" dirty="0"/>
+          </a:p>
+        </p:txBody>
+      </p:sp>
+      <p:sp>
+        <p:nvSpPr>
+          <p:cNvPr id="3" name="Shape 1"/>
+          <p:cNvSpPr/>
+          <p:nvPr/>
+        </p:nvSpPr>
+        <p:spPr>
+          <a:xfrm>
+            <a:off x="502920" y="822960"/>
+            <a:ext cx="502920" cy="41148"/>
+          </a:xfrm>
+          <a:prstGeom prst="rect">
+            <a:avLst/>
+          </a:prstGeom>
+          <a:solidFill>
+            <a:srgbClr val="935D08"/>
+          </a:solidFill>
+          <a:ln/>
+        </p:spPr>
+      </p:sp>
+      <p:sp>
+        <p:nvSpPr>
+          <p:cNvPr id="4" name="Shape 2"/>
+          <p:cNvSpPr/>
+          <p:nvPr/>
+        </p:nvSpPr>
+        <p:spPr>
+          <a:xfrm>
+            <a:off x="7635240" y="310896"/>
+            <a:ext cx="1005840" cy="292608"/>
+          </a:xfrm>
+          <a:prstGeom prst="roundRect">
+            <a:avLst>
+              <a:gd name="adj" fmla="val 15625"/>
+            </a:avLst>
+          </a:prstGeom>
+          <a:solidFill>
+            <a:srgbClr val="FEF2F2"/>
+          </a:solidFill>
+          <a:ln w="9525">
+            <a:solidFill>
+              <a:srgbClr val="991B1B"/>
+            </a:solidFill>
+            <a:prstDash val="solid"/>
+          </a:ln>
+        </p:spPr>
+      </p:sp>
+      <p:sp>
+        <p:nvSpPr>
+          <p:cNvPr id="5" name="Text 3"/>
+          <p:cNvSpPr/>
+          <p:nvPr/>
+        </p:nvSpPr>
+        <p:spPr>
+          <a:xfrm>
+            <a:off x="7635240" y="310896"/>
+            <a:ext cx="1005840" cy="292608"/>
+          </a:xfrm>
+          <a:prstGeom prst="rect">
+            <a:avLst/>
+          </a:prstGeom>
+          <a:noFill/>
+          <a:ln/>
+        </p:spPr>
+        <p:txBody>
+          <a:bodyPr wrap="square" rtlCol="0" anchor="ctr"/>
+          <a:lstStyle/>
+          <a:p>
+            <a:pPr algn="ctr" indent="0" marL="0">
+              <a:buNone/>
+            </a:pPr>
+            <a:r>
+              <a:rPr lang="en-US" sz="1050" b="1" dirty="0">
+                <a:solidFill>
+                  <a:srgbClr val="991B1B"/>
+                </a:solidFill>
+                <a:latin typeface="Microsoft JhengHei" pitchFamily="34" charset="0"/>
+                <a:ea typeface="Microsoft JhengHei" pitchFamily="34" charset="-122"/>
+                <a:cs typeface="Microsoft JhengHei" pitchFamily="34" charset="-120"/>
+              </a:rPr>
+              <a:t>🔒 機密</a:t>
+            </a:r>
+            <a:endParaRPr lang="en-US" sz="1050" dirty="0"/>
+          </a:p>
+        </p:txBody>
+      </p:sp>
+      <p:sp>
+        <p:nvSpPr>
+          <p:cNvPr id="6" name="Text 4"/>
+          <p:cNvSpPr/>
+          <p:nvPr/>
+        </p:nvSpPr>
+        <p:spPr>
+          <a:xfrm>
+            <a:off x="8321040" y="4759452"/>
+            <a:ext cx="457200" cy="256032"/>
+          </a:xfrm>
+          <a:prstGeom prst="rect">
+            <a:avLst/>
+          </a:prstGeom>
+          <a:noFill/>
+          <a:ln/>
+        </p:spPr>
+        <p:txBody>
+          <a:bodyPr wrap="square" rtlCol="0" anchor="ctr"/>
+          <a:lstStyle/>
+          <a:p>
+            <a:pPr algn="r" indent="0" marL="0">
+              <a:buNone/>
+            </a:pPr>
+            <a:r>
+              <a:rPr lang="en-US" sz="1000" dirty="0">
+                <a:solidFill>
+                  <a:srgbClr val="DAD9D6"/>
+                </a:solidFill>
+                <a:latin typeface="Microsoft JhengHei" pitchFamily="34" charset="0"/>
+                <a:ea typeface="Microsoft JhengHei" pitchFamily="34" charset="-122"/>
+                <a:cs typeface="Microsoft JhengHei" pitchFamily="34" charset="-120"/>
+              </a:rPr>
+              <a:t>10</a:t>
+            </a:r>
+            <a:endParaRPr lang="en-US" sz="1000" dirty="0"/>
+          </a:p>
+        </p:txBody>
+      </p:sp>
+      <p:sp>
+        <p:nvSpPr>
+          <p:cNvPr id="7" name="Text 5"/>
+          <p:cNvSpPr/>
+          <p:nvPr/>
+        </p:nvSpPr>
+        <p:spPr>
+          <a:xfrm>
+            <a:off x="502920" y="4759452"/>
+            <a:ext cx="4572000" cy="256032"/>
+          </a:xfrm>
+          <a:prstGeom prst="rect">
+            <a:avLst/>
+          </a:prstGeom>
+          <a:noFill/>
+          <a:ln/>
+        </p:spPr>
+        <p:txBody>
+          <a:bodyPr wrap="square" rtlCol="0" anchor="ctr"/>
+          <a:lstStyle/>
+          <a:p>
+            <a:pPr indent="0" marL="0">
+              <a:buNone/>
+            </a:pPr>
+            <a:r>
+              <a:rPr lang="en-US" sz="900" dirty="0">
+                <a:solidFill>
+                  <a:srgbClr val="DAD9D6"/>
+                </a:solidFill>
+                <a:latin typeface="Microsoft JhengHei" pitchFamily="34" charset="0"/>
+                <a:ea typeface="Microsoft JhengHei" pitchFamily="34" charset="-122"/>
+                <a:cs typeface="Microsoft JhengHei" pitchFamily="34" charset="-120"/>
+              </a:rPr>
+              <a:t>洲遊幣 Lite · 管理手冊 · 限授權人員</a:t>
+            </a:r>
+            <a:endParaRPr lang="en-US" sz="900" dirty="0"/>
+          </a:p>
+        </p:txBody>
+      </p:sp>
       <p:sp>
         <p:nvSpPr>
           <p:cNvPr id="8" name="Text 6"/>
@@ -2220,7 +3540,25 @@
                 <a:ea typeface="Microsoft JhengHei" pitchFamily="34" charset="-122"/>
                 <a:cs typeface="Microsoft JhengHei" pitchFamily="34" charset="-120"/>
               </a:rPr>
-              <a:t>☐  抽到臺北的獎 → 看不到領取連結、只跳聯絡表單 → 後台「臺北待聯繫」查得到
+              <a:t>☐  抽到臺北的獎 → 看不到領取連結、只跳聯絡表單 → 後台「待聯繫名單」查得到
+</a:t>
+            </a:r>
+            <a:pPr indent="0" marL="0">
+              <a:lnSpc>
+                <a:spcPts val="2600"/>
+              </a:lnSpc>
+              <a:buNone/>
+            </a:pPr>
+            <a:r>
+              <a:rPr lang="en-US" sz="1250" b="1" dirty="0">
+                <a:solidFill>
+                  <a:srgbClr val="3D3935"/>
+                </a:solidFill>
+                <a:latin typeface="Microsoft JhengHei" pitchFamily="34" charset="0"/>
+                <a:ea typeface="Microsoft JhengHei" pitchFamily="34" charset="-122"/>
+                <a:cs typeface="Microsoft JhengHei" pitchFamily="34" charset="-120"/>
+              </a:rPr>
+              <a:t>☐  抽到高雄的住宿大獎 → 同樣只跳表單，且表單顯示高雄洲際的標誌與名稱
 </a:t>
             </a:r>
             <a:pPr indent="0" marL="0">
@@ -2238,7 +3576,7 @@
                 <a:ea typeface="Microsoft JhengHei" pitchFamily="34" charset="-122"/>
                 <a:cs typeface="Microsoft JhengHei" pitchFamily="34" charset="-120"/>
               </a:rPr>
-              <a:t>☐  刻意跳過臺北表單 → 關掉重開遊戲 → 應該要再問一次
+              <a:t>☐  刻意跳過表單 → 關掉重開遊戲 → 應該要再問一次，且飯店名稱正確
 </a:t>
             </a:r>
             <a:pPr indent="0" marL="0">
@@ -2578,7 +3916,7 @@
                 <a:gridCol w="1737360"/>
                 <a:gridCol w="6400800"/>
               </a:tblGrid>
-              <a:tr h="402336">
+              <a:tr h="384048">
                 <a:tc>
                   <a:txBody>
                     <a:bodyPr/>
@@ -2716,7 +4054,7 @@
                   </a:tcPr>
                 </a:tc>
               </a:tr>
-              <a:tr h="402336">
+              <a:tr h="384048">
                 <a:tc>
                   <a:txBody>
                     <a:bodyPr/>
@@ -2854,7 +4192,7 @@
                   </a:tcPr>
                 </a:tc>
               </a:tr>
-              <a:tr h="402336">
+              <a:tr h="384048">
                 <a:tc>
                   <a:txBody>
                     <a:bodyPr/>
@@ -2992,7 +4330,7 @@
                   </a:tcPr>
                 </a:tc>
               </a:tr>
-              <a:tr h="402336">
+              <a:tr h="384048">
                 <a:tc>
                   <a:txBody>
                     <a:bodyPr/>
@@ -3130,7 +4468,7 @@
                   </a:tcPr>
                 </a:tc>
               </a:tr>
-              <a:tr h="402336">
+              <a:tr h="384048">
                 <a:tc>
                   <a:txBody>
                     <a:bodyPr/>
@@ -3268,7 +4606,7 @@
                   </a:tcPr>
                 </a:tc>
               </a:tr>
-              <a:tr h="402336">
+              <a:tr h="384048">
                 <a:tc>
                   <a:txBody>
                     <a:bodyPr/>
@@ -3354,7 +4692,7 @@
                           <a:ea typeface="Microsoft JhengHei" pitchFamily="34" charset="-122"/>
                           <a:cs typeface="Microsoft JhengHei" pitchFamily="34" charset="-120"/>
                         </a:rPr>
-                        <a:t>是另一個 LINE 官方帳號，我們沒有推播權限 → 臺北的獎才需要專人聯繫</a:t>
+                        <a:t>是另一個 LINE 官方帳號，我們沒有推播權限</a:t>
                       </a:r>
                       <a:endParaRPr lang="en-US" sz="1100" dirty="0">
                         <a:latin typeface="Microsoft JhengHei" charset="0"/>
@@ -3412,18 +4750,706 @@
       </p:graphicFrame>
       <p:sp>
         <p:nvSpPr>
-          <p:cNvPr id="9" name="Shape 6"/>
+          <p:cNvPr id="9" name="Text 6"/>
           <p:cNvSpPr/>
           <p:nvPr/>
         </p:nvSpPr>
         <p:spPr>
           <a:xfrm>
-            <a:off x="502920" y="3840480"/>
-            <a:ext cx="8138160" cy="658368"/>
+            <a:off x="502920" y="3108960"/>
+            <a:ext cx="8138160" cy="274320"/>
+          </a:xfrm>
+          <a:prstGeom prst="rect">
+            <a:avLst/>
+          </a:prstGeom>
+          <a:noFill/>
+          <a:ln/>
+        </p:spPr>
+        <p:txBody>
+          <a:bodyPr wrap="square" rtlCol="0" anchor="ctr"/>
+          <a:lstStyle/>
+          <a:p>
+            <a:pPr indent="0" marL="0">
+              <a:buNone/>
+            </a:pPr>
+            <a:r>
+              <a:rPr lang="en-US" sz="1300" b="1" dirty="0">
+                <a:solidFill>
+                  <a:srgbClr val="3D3935"/>
+                </a:solidFill>
+                <a:latin typeface="Microsoft JhengHei" pitchFamily="34" charset="0"/>
+                <a:ea typeface="Microsoft JhengHei" pitchFamily="34" charset="-122"/>
+                <a:cs typeface="Microsoft JhengHei" pitchFamily="34" charset="-120"/>
+              </a:rPr>
+              <a:t>領獎方式是【逐一獎項】設定，不是依館別</a:t>
+            </a:r>
+            <a:endParaRPr lang="en-US" sz="1300" dirty="0"/>
+          </a:p>
+        </p:txBody>
+      </p:sp>
+      <p:graphicFrame>
+        <p:nvGraphicFramePr>
+          <p:cNvPr id="5" name="Table 1"/>
+          <p:cNvGraphicFramePr>
+            <a:graphicFrameLocks noGrp="1"/>
+          </p:cNvGraphicFramePr>
+          <p:nvPr>
+            <p:extLst>
+              <p:ext uri="{D42A27DB-BD31-4B8C-83A1-F6EECF244321}">
+                <p14:modId xmlns:p14="http://schemas.microsoft.com/office/powerpoint/2010/main" val="1579011935"/>
+              </p:ext>
+            </p:extLst>
+          </p:nvPr>
+        </p:nvGraphicFramePr>
+        <p:xfrm>
+          <a:off x="502920" y="3419856"/>
+          <a:ext cx="8138160" cy="914400"/>
+        </p:xfrm>
+        <a:graphic>
+          <a:graphicData uri="http://schemas.openxmlformats.org/drawingml/2006/table">
+            <a:tbl>
+              <a:tblPr/>
+              <a:tblGrid>
+                <a:gridCol w="1371600"/>
+                <a:gridCol w="3840480"/>
+                <a:gridCol w="2926080"/>
+              </a:tblGrid>
+              <a:tr h="329184">
+                <a:tc>
+                  <a:txBody>
+                    <a:bodyPr/>
+                    <a:lstStyle/>
+                    <a:p>
+                      <a:pPr indent="0" marL="0">
+                        <a:buNone/>
+                      </a:pPr>
+                      <a:r>
+                        <a:rPr lang="en-US" sz="1050" b="1" dirty="0">
+                          <a:solidFill>
+                            <a:srgbClr val="3D3935"/>
+                          </a:solidFill>
+                          <a:latin typeface="Microsoft JhengHei" pitchFamily="34" charset="0"/>
+                          <a:ea typeface="Microsoft JhengHei" pitchFamily="34" charset="-122"/>
+                          <a:cs typeface="Microsoft JhengHei" pitchFamily="34" charset="-120"/>
+                        </a:rPr>
+                        <a:t>claim_mode</a:t>
+                      </a:r>
+                      <a:endParaRPr lang="en-US" sz="1050" dirty="0">
+                        <a:latin typeface="Microsoft JhengHei" charset="0"/>
+                        <a:ea typeface="Microsoft JhengHei" charset="0"/>
+                        <a:cs typeface="Microsoft JhengHei" charset="0"/>
+                      </a:endParaRPr>
+                    </a:p>
+                  </a:txBody>
+                  <a:tcPr marL="91440" marR="91440" marT="45720" marB="45720" anchor="ctr">
+                    <a:lnL w="6350" cap="flat" cmpd="sng" algn="ctr">
+                      <a:solidFill>
+                        <a:srgbClr val="DAD9D6"/>
+                      </a:solidFill>
+                      <a:prstDash val="solid"/>
+                      <a:round/>
+                      <a:headEnd type="none" w="med" len="med"/>
+                      <a:tailEnd type="none" w="med" len="med"/>
+                    </a:lnL>
+                    <a:lnR w="6350" cap="flat" cmpd="sng" algn="ctr">
+                      <a:solidFill>
+                        <a:srgbClr val="DAD9D6"/>
+                      </a:solidFill>
+                      <a:prstDash val="solid"/>
+                      <a:round/>
+                      <a:headEnd type="none" w="med" len="med"/>
+                      <a:tailEnd type="none" w="med" len="med"/>
+                    </a:lnR>
+                    <a:lnT w="6350" cap="flat" cmpd="sng" algn="ctr">
+                      <a:solidFill>
+                        <a:srgbClr val="DAD9D6"/>
+                      </a:solidFill>
+                      <a:prstDash val="solid"/>
+                      <a:round/>
+                      <a:headEnd type="none" w="med" len="med"/>
+                      <a:tailEnd type="none" w="med" len="med"/>
+                    </a:lnT>
+                    <a:lnB w="6350" cap="flat" cmpd="sng" algn="ctr">
+                      <a:solidFill>
+                        <a:srgbClr val="DAD9D6"/>
+                      </a:solidFill>
+                      <a:prstDash val="solid"/>
+                      <a:round/>
+                      <a:headEnd type="none" w="med" len="med"/>
+                      <a:tailEnd type="none" w="med" len="med"/>
+                    </a:lnB>
+                    <a:solidFill>
+                      <a:srgbClr val="F4ECE7"/>
+                    </a:solidFill>
+                  </a:tcPr>
+                </a:tc>
+                <a:tc>
+                  <a:txBody>
+                    <a:bodyPr/>
+                    <a:lstStyle/>
+                    <a:p>
+                      <a:pPr indent="0" marL="0">
+                        <a:buNone/>
+                      </a:pPr>
+                      <a:r>
+                        <a:rPr lang="en-US" sz="1050" b="1" dirty="0">
+                          <a:solidFill>
+                            <a:srgbClr val="3D3935"/>
+                          </a:solidFill>
+                          <a:latin typeface="Microsoft JhengHei" pitchFamily="34" charset="0"/>
+                          <a:ea typeface="Microsoft JhengHei" pitchFamily="34" charset="-122"/>
+                          <a:cs typeface="Microsoft JhengHei" pitchFamily="34" charset="-120"/>
+                        </a:rPr>
+                        <a:t>行為</a:t>
+                      </a:r>
+                      <a:endParaRPr lang="en-US" sz="1050" dirty="0">
+                        <a:latin typeface="Microsoft JhengHei" charset="0"/>
+                        <a:ea typeface="Microsoft JhengHei" charset="0"/>
+                        <a:cs typeface="Microsoft JhengHei" charset="0"/>
+                      </a:endParaRPr>
+                    </a:p>
+                  </a:txBody>
+                  <a:tcPr marL="91440" marR="91440" marT="45720" marB="45720" anchor="ctr">
+                    <a:lnL w="6350" cap="flat" cmpd="sng" algn="ctr">
+                      <a:solidFill>
+                        <a:srgbClr val="DAD9D6"/>
+                      </a:solidFill>
+                      <a:prstDash val="solid"/>
+                      <a:round/>
+                      <a:headEnd type="none" w="med" len="med"/>
+                      <a:tailEnd type="none" w="med" len="med"/>
+                    </a:lnL>
+                    <a:lnR w="6350" cap="flat" cmpd="sng" algn="ctr">
+                      <a:solidFill>
+                        <a:srgbClr val="DAD9D6"/>
+                      </a:solidFill>
+                      <a:prstDash val="solid"/>
+                      <a:round/>
+                      <a:headEnd type="none" w="med" len="med"/>
+                      <a:tailEnd type="none" w="med" len="med"/>
+                    </a:lnR>
+                    <a:lnT w="6350" cap="flat" cmpd="sng" algn="ctr">
+                      <a:solidFill>
+                        <a:srgbClr val="DAD9D6"/>
+                      </a:solidFill>
+                      <a:prstDash val="solid"/>
+                      <a:round/>
+                      <a:headEnd type="none" w="med" len="med"/>
+                      <a:tailEnd type="none" w="med" len="med"/>
+                    </a:lnT>
+                    <a:lnB w="6350" cap="flat" cmpd="sng" algn="ctr">
+                      <a:solidFill>
+                        <a:srgbClr val="DAD9D6"/>
+                      </a:solidFill>
+                      <a:prstDash val="solid"/>
+                      <a:round/>
+                      <a:headEnd type="none" w="med" len="med"/>
+                      <a:tailEnd type="none" w="med" len="med"/>
+                    </a:lnB>
+                    <a:solidFill>
+                      <a:srgbClr val="F4ECE7"/>
+                    </a:solidFill>
+                  </a:tcPr>
+                </a:tc>
+                <a:tc>
+                  <a:txBody>
+                    <a:bodyPr/>
+                    <a:lstStyle/>
+                    <a:p>
+                      <a:pPr indent="0" marL="0">
+                        <a:buNone/>
+                      </a:pPr>
+                      <a:r>
+                        <a:rPr lang="en-US" sz="1050" b="1" dirty="0">
+                          <a:solidFill>
+                            <a:srgbClr val="3D3935"/>
+                          </a:solidFill>
+                          <a:latin typeface="Microsoft JhengHei" pitchFamily="34" charset="0"/>
+                          <a:ea typeface="Microsoft JhengHei" pitchFamily="34" charset="-122"/>
+                          <a:cs typeface="Microsoft JhengHei" pitchFamily="34" charset="-120"/>
+                        </a:rPr>
+                        <a:t>適用</a:t>
+                      </a:r>
+                      <a:endParaRPr lang="en-US" sz="1050" dirty="0">
+                        <a:latin typeface="Microsoft JhengHei" charset="0"/>
+                        <a:ea typeface="Microsoft JhengHei" charset="0"/>
+                        <a:cs typeface="Microsoft JhengHei" charset="0"/>
+                      </a:endParaRPr>
+                    </a:p>
+                  </a:txBody>
+                  <a:tcPr marL="91440" marR="91440" marT="45720" marB="45720" anchor="ctr">
+                    <a:lnL w="6350" cap="flat" cmpd="sng" algn="ctr">
+                      <a:solidFill>
+                        <a:srgbClr val="DAD9D6"/>
+                      </a:solidFill>
+                      <a:prstDash val="solid"/>
+                      <a:round/>
+                      <a:headEnd type="none" w="med" len="med"/>
+                      <a:tailEnd type="none" w="med" len="med"/>
+                    </a:lnL>
+                    <a:lnR w="6350" cap="flat" cmpd="sng" algn="ctr">
+                      <a:solidFill>
+                        <a:srgbClr val="DAD9D6"/>
+                      </a:solidFill>
+                      <a:prstDash val="solid"/>
+                      <a:round/>
+                      <a:headEnd type="none" w="med" len="med"/>
+                      <a:tailEnd type="none" w="med" len="med"/>
+                    </a:lnR>
+                    <a:lnT w="6350" cap="flat" cmpd="sng" algn="ctr">
+                      <a:solidFill>
+                        <a:srgbClr val="DAD9D6"/>
+                      </a:solidFill>
+                      <a:prstDash val="solid"/>
+                      <a:round/>
+                      <a:headEnd type="none" w="med" len="med"/>
+                      <a:tailEnd type="none" w="med" len="med"/>
+                    </a:lnT>
+                    <a:lnB w="6350" cap="flat" cmpd="sng" algn="ctr">
+                      <a:solidFill>
+                        <a:srgbClr val="DAD9D6"/>
+                      </a:solidFill>
+                      <a:prstDash val="solid"/>
+                      <a:round/>
+                      <a:headEnd type="none" w="med" len="med"/>
+                      <a:tailEnd type="none" w="med" len="med"/>
+                    </a:lnB>
+                    <a:solidFill>
+                      <a:srgbClr val="F4ECE7"/>
+                    </a:solidFill>
+                  </a:tcPr>
+                </a:tc>
+              </a:tr>
+              <a:tr h="329184">
+                <a:tc>
+                  <a:txBody>
+                    <a:bodyPr/>
+                    <a:lstStyle/>
+                    <a:p>
+                      <a:pPr indent="0" marL="0">
+                        <a:buNone/>
+                      </a:pPr>
+                      <a:r>
+                        <a:rPr lang="en-US" sz="1050" dirty="0">
+                          <a:solidFill>
+                            <a:srgbClr val="3D3935"/>
+                          </a:solidFill>
+                          <a:latin typeface="Microsoft JhengHei" pitchFamily="34" charset="0"/>
+                          <a:ea typeface="Microsoft JhengHei" pitchFamily="34" charset="-122"/>
+                          <a:cs typeface="Microsoft JhengHei" pitchFamily="34" charset="-120"/>
+                        </a:rPr>
+                        <a:t>coupon</a:t>
+                      </a:r>
+                      <a:endParaRPr lang="en-US" sz="1050" dirty="0">
+                        <a:latin typeface="Microsoft JhengHei" charset="0"/>
+                        <a:ea typeface="Microsoft JhengHei" charset="0"/>
+                        <a:cs typeface="Microsoft JhengHei" charset="0"/>
+                      </a:endParaRPr>
+                    </a:p>
+                  </a:txBody>
+                  <a:tcPr marL="91440" marR="91440" marT="45720" marB="45720" anchor="ctr">
+                    <a:lnL w="6350" cap="flat" cmpd="sng" algn="ctr">
+                      <a:solidFill>
+                        <a:srgbClr val="DAD9D6"/>
+                      </a:solidFill>
+                      <a:prstDash val="solid"/>
+                      <a:round/>
+                      <a:headEnd type="none" w="med" len="med"/>
+                      <a:tailEnd type="none" w="med" len="med"/>
+                    </a:lnL>
+                    <a:lnR w="6350" cap="flat" cmpd="sng" algn="ctr">
+                      <a:solidFill>
+                        <a:srgbClr val="DAD9D6"/>
+                      </a:solidFill>
+                      <a:prstDash val="solid"/>
+                      <a:round/>
+                      <a:headEnd type="none" w="med" len="med"/>
+                      <a:tailEnd type="none" w="med" len="med"/>
+                    </a:lnR>
+                    <a:lnT w="6350" cap="flat" cmpd="sng" algn="ctr">
+                      <a:solidFill>
+                        <a:srgbClr val="DAD9D6"/>
+                      </a:solidFill>
+                      <a:prstDash val="solid"/>
+                      <a:round/>
+                      <a:headEnd type="none" w="med" len="med"/>
+                      <a:tailEnd type="none" w="med" len="med"/>
+                    </a:lnT>
+                    <a:lnB w="6350" cap="flat" cmpd="sng" algn="ctr">
+                      <a:solidFill>
+                        <a:srgbClr val="DAD9D6"/>
+                      </a:solidFill>
+                      <a:prstDash val="solid"/>
+                      <a:round/>
+                      <a:headEnd type="none" w="med" len="med"/>
+                      <a:tailEnd type="none" w="med" len="med"/>
+                    </a:lnB>
+                    <a:solidFill>
+                      <a:srgbClr val="FFFFFF"/>
+                    </a:solidFill>
+                  </a:tcPr>
+                </a:tc>
+                <a:tc>
+                  <a:txBody>
+                    <a:bodyPr/>
+                    <a:lstStyle/>
+                    <a:p>
+                      <a:pPr indent="0" marL="0">
+                        <a:buNone/>
+                      </a:pPr>
+                      <a:r>
+                        <a:rPr lang="en-US" sz="1050" dirty="0">
+                          <a:solidFill>
+                            <a:srgbClr val="3D3935"/>
+                          </a:solidFill>
+                          <a:latin typeface="Microsoft JhengHei" pitchFamily="34" charset="0"/>
+                          <a:ea typeface="Microsoft JhengHei" pitchFamily="34" charset="-122"/>
+                          <a:cs typeface="Microsoft JhengHei" pitchFamily="34" charset="-120"/>
+                        </a:rPr>
+                        <a:t>Omnichat 券推到客人 LINE，連結單次有效</a:t>
+                      </a:r>
+                      <a:endParaRPr lang="en-US" sz="1050" dirty="0">
+                        <a:latin typeface="Microsoft JhengHei" charset="0"/>
+                        <a:ea typeface="Microsoft JhengHei" charset="0"/>
+                        <a:cs typeface="Microsoft JhengHei" charset="0"/>
+                      </a:endParaRPr>
+                    </a:p>
+                  </a:txBody>
+                  <a:tcPr marL="91440" marR="91440" marT="45720" marB="45720" anchor="ctr">
+                    <a:lnL w="6350" cap="flat" cmpd="sng" algn="ctr">
+                      <a:solidFill>
+                        <a:srgbClr val="DAD9D6"/>
+                      </a:solidFill>
+                      <a:prstDash val="solid"/>
+                      <a:round/>
+                      <a:headEnd type="none" w="med" len="med"/>
+                      <a:tailEnd type="none" w="med" len="med"/>
+                    </a:lnL>
+                    <a:lnR w="6350" cap="flat" cmpd="sng" algn="ctr">
+                      <a:solidFill>
+                        <a:srgbClr val="DAD9D6"/>
+                      </a:solidFill>
+                      <a:prstDash val="solid"/>
+                      <a:round/>
+                      <a:headEnd type="none" w="med" len="med"/>
+                      <a:tailEnd type="none" w="med" len="med"/>
+                    </a:lnR>
+                    <a:lnT w="6350" cap="flat" cmpd="sng" algn="ctr">
+                      <a:solidFill>
+                        <a:srgbClr val="DAD9D6"/>
+                      </a:solidFill>
+                      <a:prstDash val="solid"/>
+                      <a:round/>
+                      <a:headEnd type="none" w="med" len="med"/>
+                      <a:tailEnd type="none" w="med" len="med"/>
+                    </a:lnT>
+                    <a:lnB w="6350" cap="flat" cmpd="sng" algn="ctr">
+                      <a:solidFill>
+                        <a:srgbClr val="DAD9D6"/>
+                      </a:solidFill>
+                      <a:prstDash val="solid"/>
+                      <a:round/>
+                      <a:headEnd type="none" w="med" len="med"/>
+                      <a:tailEnd type="none" w="med" len="med"/>
+                    </a:lnB>
+                    <a:solidFill>
+                      <a:srgbClr val="FFFFFF"/>
+                    </a:solidFill>
+                  </a:tcPr>
+                </a:tc>
+                <a:tc>
+                  <a:txBody>
+                    <a:bodyPr/>
+                    <a:lstStyle/>
+                    <a:p>
+                      <a:pPr indent="0" marL="0">
+                        <a:buNone/>
+                      </a:pPr>
+                      <a:r>
+                        <a:rPr lang="en-US" sz="1050" dirty="0">
+                          <a:solidFill>
+                            <a:srgbClr val="3D3935"/>
+                          </a:solidFill>
+                          <a:latin typeface="Microsoft JhengHei" pitchFamily="34" charset="0"/>
+                          <a:ea typeface="Microsoft JhengHei" pitchFamily="34" charset="-122"/>
+                          <a:cs typeface="Microsoft JhengHei" pitchFamily="34" charset="-120"/>
+                        </a:rPr>
+                        <a:t>高雄的 9 個獎項</a:t>
+                      </a:r>
+                      <a:endParaRPr lang="en-US" sz="1050" dirty="0">
+                        <a:latin typeface="Microsoft JhengHei" charset="0"/>
+                        <a:ea typeface="Microsoft JhengHei" charset="0"/>
+                        <a:cs typeface="Microsoft JhengHei" charset="0"/>
+                      </a:endParaRPr>
+                    </a:p>
+                  </a:txBody>
+                  <a:tcPr marL="91440" marR="91440" marT="45720" marB="45720" anchor="ctr">
+                    <a:lnL w="6350" cap="flat" cmpd="sng" algn="ctr">
+                      <a:solidFill>
+                        <a:srgbClr val="DAD9D6"/>
+                      </a:solidFill>
+                      <a:prstDash val="solid"/>
+                      <a:round/>
+                      <a:headEnd type="none" w="med" len="med"/>
+                      <a:tailEnd type="none" w="med" len="med"/>
+                    </a:lnL>
+                    <a:lnR w="6350" cap="flat" cmpd="sng" algn="ctr">
+                      <a:solidFill>
+                        <a:srgbClr val="DAD9D6"/>
+                      </a:solidFill>
+                      <a:prstDash val="solid"/>
+                      <a:round/>
+                      <a:headEnd type="none" w="med" len="med"/>
+                      <a:tailEnd type="none" w="med" len="med"/>
+                    </a:lnR>
+                    <a:lnT w="6350" cap="flat" cmpd="sng" algn="ctr">
+                      <a:solidFill>
+                        <a:srgbClr val="DAD9D6"/>
+                      </a:solidFill>
+                      <a:prstDash val="solid"/>
+                      <a:round/>
+                      <a:headEnd type="none" w="med" len="med"/>
+                      <a:tailEnd type="none" w="med" len="med"/>
+                    </a:lnT>
+                    <a:lnB w="6350" cap="flat" cmpd="sng" algn="ctr">
+                      <a:solidFill>
+                        <a:srgbClr val="DAD9D6"/>
+                      </a:solidFill>
+                      <a:prstDash val="solid"/>
+                      <a:round/>
+                      <a:headEnd type="none" w="med" len="med"/>
+                      <a:tailEnd type="none" w="med" len="med"/>
+                    </a:lnB>
+                    <a:solidFill>
+                      <a:srgbClr val="FFFFFF"/>
+                    </a:solidFill>
+                  </a:tcPr>
+                </a:tc>
+              </a:tr>
+              <a:tr h="329184">
+                <a:tc>
+                  <a:txBody>
+                    <a:bodyPr/>
+                    <a:lstStyle/>
+                    <a:p>
+                      <a:pPr indent="0" marL="0">
+                        <a:buNone/>
+                      </a:pPr>
+                      <a:r>
+                        <a:rPr lang="en-US" sz="1050" b="1" dirty="0">
+                          <a:solidFill>
+                            <a:srgbClr val="3D3935"/>
+                          </a:solidFill>
+                          <a:latin typeface="Microsoft JhengHei" pitchFamily="34" charset="0"/>
+                          <a:ea typeface="Microsoft JhengHei" pitchFamily="34" charset="-122"/>
+                          <a:cs typeface="Microsoft JhengHei" pitchFamily="34" charset="-120"/>
+                        </a:rPr>
+                        <a:t>contact</a:t>
+                      </a:r>
+                      <a:endParaRPr lang="en-US" sz="1050" dirty="0">
+                        <a:latin typeface="Microsoft JhengHei" charset="0"/>
+                        <a:ea typeface="Microsoft JhengHei" charset="0"/>
+                        <a:cs typeface="Microsoft JhengHei" charset="0"/>
+                      </a:endParaRPr>
+                    </a:p>
+                  </a:txBody>
+                  <a:tcPr marL="91440" marR="91440" marT="45720" marB="45720" anchor="ctr">
+                    <a:lnL w="6350" cap="flat" cmpd="sng" algn="ctr">
+                      <a:solidFill>
+                        <a:srgbClr val="DAD9D6"/>
+                      </a:solidFill>
+                      <a:prstDash val="solid"/>
+                      <a:round/>
+                      <a:headEnd type="none" w="med" len="med"/>
+                      <a:tailEnd type="none" w="med" len="med"/>
+                    </a:lnL>
+                    <a:lnR w="6350" cap="flat" cmpd="sng" algn="ctr">
+                      <a:solidFill>
+                        <a:srgbClr val="DAD9D6"/>
+                      </a:solidFill>
+                      <a:prstDash val="solid"/>
+                      <a:round/>
+                      <a:headEnd type="none" w="med" len="med"/>
+                      <a:tailEnd type="none" w="med" len="med"/>
+                    </a:lnR>
+                    <a:lnT w="6350" cap="flat" cmpd="sng" algn="ctr">
+                      <a:solidFill>
+                        <a:srgbClr val="DAD9D6"/>
+                      </a:solidFill>
+                      <a:prstDash val="solid"/>
+                      <a:round/>
+                      <a:headEnd type="none" w="med" len="med"/>
+                      <a:tailEnd type="none" w="med" len="med"/>
+                    </a:lnT>
+                    <a:lnB w="6350" cap="flat" cmpd="sng" algn="ctr">
+                      <a:solidFill>
+                        <a:srgbClr val="DAD9D6"/>
+                      </a:solidFill>
+                      <a:prstDash val="solid"/>
+                      <a:round/>
+                      <a:headEnd type="none" w="med" len="med"/>
+                      <a:tailEnd type="none" w="med" len="med"/>
+                    </a:lnB>
+                    <a:solidFill>
+                      <a:srgbClr val="FFFFFF"/>
+                    </a:solidFill>
+                  </a:tcPr>
+                </a:tc>
+                <a:tc>
+                  <a:txBody>
+                    <a:bodyPr/>
+                    <a:lstStyle/>
+                    <a:p>
+                      <a:pPr indent="0" marL="0">
+                        <a:buNone/>
+                      </a:pPr>
+                      <a:r>
+                        <a:rPr lang="en-US" sz="1050" dirty="0">
+                          <a:solidFill>
+                            <a:srgbClr val="3D3935"/>
+                          </a:solidFill>
+                          <a:latin typeface="Microsoft JhengHei" pitchFamily="34" charset="0"/>
+                          <a:ea typeface="Microsoft JhengHei" pitchFamily="34" charset="-122"/>
+                          <a:cs typeface="Microsoft JhengHei" pitchFamily="34" charset="-120"/>
+                        </a:rPr>
+                        <a:t>不發券，跳表單收聯絡資訊，由該館專人聯繫</a:t>
+                      </a:r>
+                      <a:endParaRPr lang="en-US" sz="1050" dirty="0">
+                        <a:latin typeface="Microsoft JhengHei" charset="0"/>
+                        <a:ea typeface="Microsoft JhengHei" charset="0"/>
+                        <a:cs typeface="Microsoft JhengHei" charset="0"/>
+                      </a:endParaRPr>
+                    </a:p>
+                  </a:txBody>
+                  <a:tcPr marL="91440" marR="91440" marT="45720" marB="45720" anchor="ctr">
+                    <a:lnL w="6350" cap="flat" cmpd="sng" algn="ctr">
+                      <a:solidFill>
+                        <a:srgbClr val="DAD9D6"/>
+                      </a:solidFill>
+                      <a:prstDash val="solid"/>
+                      <a:round/>
+                      <a:headEnd type="none" w="med" len="med"/>
+                      <a:tailEnd type="none" w="med" len="med"/>
+                    </a:lnL>
+                    <a:lnR w="6350" cap="flat" cmpd="sng" algn="ctr">
+                      <a:solidFill>
+                        <a:srgbClr val="DAD9D6"/>
+                      </a:solidFill>
+                      <a:prstDash val="solid"/>
+                      <a:round/>
+                      <a:headEnd type="none" w="med" len="med"/>
+                      <a:tailEnd type="none" w="med" len="med"/>
+                    </a:lnR>
+                    <a:lnT w="6350" cap="flat" cmpd="sng" algn="ctr">
+                      <a:solidFill>
+                        <a:srgbClr val="DAD9D6"/>
+                      </a:solidFill>
+                      <a:prstDash val="solid"/>
+                      <a:round/>
+                      <a:headEnd type="none" w="med" len="med"/>
+                      <a:tailEnd type="none" w="med" len="med"/>
+                    </a:lnT>
+                    <a:lnB w="6350" cap="flat" cmpd="sng" algn="ctr">
+                      <a:solidFill>
+                        <a:srgbClr val="DAD9D6"/>
+                      </a:solidFill>
+                      <a:prstDash val="solid"/>
+                      <a:round/>
+                      <a:headEnd type="none" w="med" len="med"/>
+                      <a:tailEnd type="none" w="med" len="med"/>
+                    </a:lnB>
+                    <a:solidFill>
+                      <a:srgbClr val="FFFFFF"/>
+                    </a:solidFill>
+                  </a:tcPr>
+                </a:tc>
+                <a:tc>
+                  <a:txBody>
+                    <a:bodyPr/>
+                    <a:lstStyle/>
+                    <a:p>
+                      <a:pPr indent="0" marL="0">
+                        <a:buNone/>
+                      </a:pPr>
+                      <a:r>
+                        <a:rPr lang="en-US" sz="1050" b="1" dirty="0">
+                          <a:solidFill>
+                            <a:srgbClr val="3D3935"/>
+                          </a:solidFill>
+                          <a:latin typeface="Microsoft JhengHei" pitchFamily="34" charset="0"/>
+                          <a:ea typeface="Microsoft JhengHei" pitchFamily="34" charset="-122"/>
+                          <a:cs typeface="Microsoft JhengHei" pitchFamily="34" charset="-120"/>
+                        </a:rPr>
+                        <a:t>臺北全部 6 個 ＋ 高雄的 2 項住宿大獎</a:t>
+                      </a:r>
+                      <a:endParaRPr lang="en-US" sz="1050" dirty="0">
+                        <a:latin typeface="Microsoft JhengHei" charset="0"/>
+                        <a:ea typeface="Microsoft JhengHei" charset="0"/>
+                        <a:cs typeface="Microsoft JhengHei" charset="0"/>
+                      </a:endParaRPr>
+                    </a:p>
+                  </a:txBody>
+                  <a:tcPr marL="91440" marR="91440" marT="45720" marB="45720" anchor="ctr">
+                    <a:lnL w="6350" cap="flat" cmpd="sng" algn="ctr">
+                      <a:solidFill>
+                        <a:srgbClr val="DAD9D6"/>
+                      </a:solidFill>
+                      <a:prstDash val="solid"/>
+                      <a:round/>
+                      <a:headEnd type="none" w="med" len="med"/>
+                      <a:tailEnd type="none" w="med" len="med"/>
+                    </a:lnL>
+                    <a:lnR w="6350" cap="flat" cmpd="sng" algn="ctr">
+                      <a:solidFill>
+                        <a:srgbClr val="DAD9D6"/>
+                      </a:solidFill>
+                      <a:prstDash val="solid"/>
+                      <a:round/>
+                      <a:headEnd type="none" w="med" len="med"/>
+                      <a:tailEnd type="none" w="med" len="med"/>
+                    </a:lnR>
+                    <a:lnT w="6350" cap="flat" cmpd="sng" algn="ctr">
+                      <a:solidFill>
+                        <a:srgbClr val="DAD9D6"/>
+                      </a:solidFill>
+                      <a:prstDash val="solid"/>
+                      <a:round/>
+                      <a:headEnd type="none" w="med" len="med"/>
+                      <a:tailEnd type="none" w="med" len="med"/>
+                    </a:lnT>
+                    <a:lnB w="6350" cap="flat" cmpd="sng" algn="ctr">
+                      <a:solidFill>
+                        <a:srgbClr val="DAD9D6"/>
+                      </a:solidFill>
+                      <a:prstDash val="solid"/>
+                      <a:round/>
+                      <a:headEnd type="none" w="med" len="med"/>
+                      <a:tailEnd type="none" w="med" len="med"/>
+                    </a:lnB>
+                    <a:solidFill>
+                      <a:srgbClr val="FFFFFF"/>
+                    </a:solidFill>
+                  </a:tcPr>
+                </a:tc>
+              </a:tr>
+            </a:tbl>
+          </a:graphicData>
+        </a:graphic>
+      </p:graphicFrame>
+      <p:sp>
+        <p:nvSpPr>
+          <p:cNvPr id="11" name="Shape 7"/>
+          <p:cNvSpPr/>
+          <p:nvPr/>
+        </p:nvSpPr>
+        <p:spPr>
+          <a:xfrm>
+            <a:off x="502920" y="4261104"/>
+            <a:ext cx="8138160" cy="502920"/>
           </a:xfrm>
           <a:prstGeom prst="roundRect">
             <a:avLst>
-              <a:gd name="adj" fmla="val 8333"/>
+              <a:gd name="adj" fmla="val 10909"/>
             </a:avLst>
           </a:prstGeom>
           <a:solidFill>
@@ -3439,14 +5465,14 @@
       </p:sp>
       <p:sp>
         <p:nvSpPr>
-          <p:cNvPr id="10" name="Text 7"/>
+          <p:cNvPr id="12" name="Text 8"/>
           <p:cNvSpPr/>
           <p:nvPr/>
         </p:nvSpPr>
         <p:spPr>
           <a:xfrm>
-            <a:off x="667512" y="3895344"/>
-            <a:ext cx="7808976" cy="548640"/>
+            <a:off x="667512" y="4315968"/>
+            <a:ext cx="7808976" cy="393192"/>
           </a:xfrm>
           <a:prstGeom prst="rect">
             <a:avLst/>
@@ -3484,7 +5510,7 @@
                 <a:ea typeface="Microsoft JhengHei" pitchFamily="34" charset="-122"/>
                 <a:cs typeface="Microsoft JhengHei" pitchFamily="34" charset="-120"/>
               </a:rPr>
-              <a:t>臺北細則定案 + 拿到臺北 OA token 後，把該獎項的 claim_mode 改成 coupon 就自動改走發券流程，程式不用改。</a:t>
+              <a:t>設定在 scripts/import-prizes.py 的 CONTACT_PRIZES。要改回發券把該 id 拿掉重跑匯入即可，程式不用改。</a:t>
             </a:r>
             <a:endParaRPr lang="en-US" sz="1150" dirty="0"/>
           </a:p>
@@ -3501,6 +5527,666 @@
 <file path=ppt/slides/slide3.xml><?xml version="1.0" encoding="utf-8"?>
 <p:sld xmlns:a="http://schemas.openxmlformats.org/drawingml/2006/main" xmlns:r="http://schemas.openxmlformats.org/officeDocument/2006/relationships" xmlns:p="http://schemas.openxmlformats.org/presentationml/2006/main">
   <p:cSld name="Slide 3">
+    <p:bg>
+      <p:bgPr>
+        <a:solidFill>
+          <a:srgbClr val="FAF8F6"/>
+        </a:solidFill>
+      </p:bgPr>
+    </p:bg>
+    <p:spTree>
+      <p:nvGrpSpPr>
+        <p:cNvPr id="1" name=""/>
+        <p:cNvGrpSpPr/>
+        <p:nvPr/>
+      </p:nvGrpSpPr>
+      <p:grpSpPr>
+        <a:xfrm>
+          <a:off x="0" y="0"/>
+          <a:ext cx="0" cy="0"/>
+          <a:chOff x="0" y="0"/>
+          <a:chExt cx="0" cy="0"/>
+        </a:xfrm>
+      </p:grpSpPr>
+      <p:sp>
+        <p:nvSpPr>
+          <p:cNvPr id="2" name="Text 0"/>
+          <p:cNvSpPr/>
+          <p:nvPr/>
+        </p:nvSpPr>
+        <p:spPr>
+          <a:xfrm>
+            <a:off x="502920" y="310896"/>
+            <a:ext cx="6949440" cy="457200"/>
+          </a:xfrm>
+          <a:prstGeom prst="rect">
+            <a:avLst/>
+          </a:prstGeom>
+          <a:noFill/>
+          <a:ln/>
+        </p:spPr>
+        <p:txBody>
+          <a:bodyPr wrap="square" rtlCol="0" anchor="ctr"/>
+          <a:lstStyle/>
+          <a:p>
+            <a:pPr indent="0" marL="0">
+              <a:buNone/>
+            </a:pPr>
+            <a:r>
+              <a:rPr lang="en-US" sz="2400" b="1" dirty="0">
+                <a:solidFill>
+                  <a:srgbClr val="3D3935"/>
+                </a:solidFill>
+                <a:latin typeface="Microsoft JhengHei" pitchFamily="34" charset="0"/>
+                <a:ea typeface="Microsoft JhengHei" pitchFamily="34" charset="-122"/>
+                <a:cs typeface="Microsoft JhengHei" pitchFamily="34" charset="-120"/>
+              </a:rPr>
+              <a:t>一之二、哪些獎項不發券、要專人聯繫</a:t>
+            </a:r>
+            <a:endParaRPr lang="en-US" sz="2400" dirty="0"/>
+          </a:p>
+        </p:txBody>
+      </p:sp>
+      <p:sp>
+        <p:nvSpPr>
+          <p:cNvPr id="3" name="Shape 1"/>
+          <p:cNvSpPr/>
+          <p:nvPr/>
+        </p:nvSpPr>
+        <p:spPr>
+          <a:xfrm>
+            <a:off x="502920" y="822960"/>
+            <a:ext cx="502920" cy="41148"/>
+          </a:xfrm>
+          <a:prstGeom prst="rect">
+            <a:avLst/>
+          </a:prstGeom>
+          <a:solidFill>
+            <a:srgbClr val="935D08"/>
+          </a:solidFill>
+          <a:ln/>
+        </p:spPr>
+      </p:sp>
+      <p:sp>
+        <p:nvSpPr>
+          <p:cNvPr id="4" name="Text 2"/>
+          <p:cNvSpPr/>
+          <p:nvPr/>
+        </p:nvSpPr>
+        <p:spPr>
+          <a:xfrm>
+            <a:off x="502920" y="896112"/>
+            <a:ext cx="8138160" cy="310896"/>
+          </a:xfrm>
+          <a:prstGeom prst="rect">
+            <a:avLst/>
+          </a:prstGeom>
+          <a:noFill/>
+          <a:ln/>
+        </p:spPr>
+        <p:txBody>
+          <a:bodyPr wrap="square" rtlCol="0" anchor="ctr"/>
+          <a:lstStyle/>
+          <a:p>
+            <a:pPr indent="0" marL="0">
+              <a:buNone/>
+            </a:pPr>
+            <a:r>
+              <a:rPr lang="en-US" sz="1250" dirty="0">
+                <a:solidFill>
+                  <a:srgbClr val="686869"/>
+                </a:solidFill>
+                <a:latin typeface="Microsoft JhengHei" pitchFamily="34" charset="0"/>
+                <a:ea typeface="Microsoft JhengHei" pitchFamily="34" charset="-122"/>
+                <a:cs typeface="Microsoft JhengHei" pitchFamily="34" charset="-120"/>
+              </a:rPr>
+              <a:t>判斷的關鍵是【這個獎項的 claim_mode】，不是看哪一家飯店。</a:t>
+            </a:r>
+            <a:endParaRPr lang="en-US" sz="1250" dirty="0"/>
+          </a:p>
+        </p:txBody>
+      </p:sp>
+      <p:sp>
+        <p:nvSpPr>
+          <p:cNvPr id="5" name="Shape 3"/>
+          <p:cNvSpPr/>
+          <p:nvPr/>
+        </p:nvSpPr>
+        <p:spPr>
+          <a:xfrm>
+            <a:off x="7635240" y="310896"/>
+            <a:ext cx="1005840" cy="292608"/>
+          </a:xfrm>
+          <a:prstGeom prst="roundRect">
+            <a:avLst>
+              <a:gd name="adj" fmla="val 15625"/>
+            </a:avLst>
+          </a:prstGeom>
+          <a:solidFill>
+            <a:srgbClr val="FEF2F2"/>
+          </a:solidFill>
+          <a:ln w="9525">
+            <a:solidFill>
+              <a:srgbClr val="991B1B"/>
+            </a:solidFill>
+            <a:prstDash val="solid"/>
+          </a:ln>
+        </p:spPr>
+      </p:sp>
+      <p:sp>
+        <p:nvSpPr>
+          <p:cNvPr id="6" name="Text 4"/>
+          <p:cNvSpPr/>
+          <p:nvPr/>
+        </p:nvSpPr>
+        <p:spPr>
+          <a:xfrm>
+            <a:off x="7635240" y="310896"/>
+            <a:ext cx="1005840" cy="292608"/>
+          </a:xfrm>
+          <a:prstGeom prst="rect">
+            <a:avLst/>
+          </a:prstGeom>
+          <a:noFill/>
+          <a:ln/>
+        </p:spPr>
+        <p:txBody>
+          <a:bodyPr wrap="square" rtlCol="0" anchor="ctr"/>
+          <a:lstStyle/>
+          <a:p>
+            <a:pPr algn="ctr" indent="0" marL="0">
+              <a:buNone/>
+            </a:pPr>
+            <a:r>
+              <a:rPr lang="en-US" sz="1050" b="1" dirty="0">
+                <a:solidFill>
+                  <a:srgbClr val="991B1B"/>
+                </a:solidFill>
+                <a:latin typeface="Microsoft JhengHei" pitchFamily="34" charset="0"/>
+                <a:ea typeface="Microsoft JhengHei" pitchFamily="34" charset="-122"/>
+                <a:cs typeface="Microsoft JhengHei" pitchFamily="34" charset="-120"/>
+              </a:rPr>
+              <a:t>🔒 機密</a:t>
+            </a:r>
+            <a:endParaRPr lang="en-US" sz="1050" dirty="0"/>
+          </a:p>
+        </p:txBody>
+      </p:sp>
+      <p:sp>
+        <p:nvSpPr>
+          <p:cNvPr id="7" name="Text 5"/>
+          <p:cNvSpPr/>
+          <p:nvPr/>
+        </p:nvSpPr>
+        <p:spPr>
+          <a:xfrm>
+            <a:off x="8321040" y="4759452"/>
+            <a:ext cx="457200" cy="256032"/>
+          </a:xfrm>
+          <a:prstGeom prst="rect">
+            <a:avLst/>
+          </a:prstGeom>
+          <a:noFill/>
+          <a:ln/>
+        </p:spPr>
+        <p:txBody>
+          <a:bodyPr wrap="square" rtlCol="0" anchor="ctr"/>
+          <a:lstStyle/>
+          <a:p>
+            <a:pPr algn="r" indent="0" marL="0">
+              <a:buNone/>
+            </a:pPr>
+            <a:r>
+              <a:rPr lang="en-US" sz="1000" dirty="0">
+                <a:solidFill>
+                  <a:srgbClr val="DAD9D6"/>
+                </a:solidFill>
+                <a:latin typeface="Microsoft JhengHei" pitchFamily="34" charset="0"/>
+                <a:ea typeface="Microsoft JhengHei" pitchFamily="34" charset="-122"/>
+                <a:cs typeface="Microsoft JhengHei" pitchFamily="34" charset="-120"/>
+              </a:rPr>
+              <a:t>2</a:t>
+            </a:r>
+            <a:endParaRPr lang="en-US" sz="1000" dirty="0"/>
+          </a:p>
+        </p:txBody>
+      </p:sp>
+      <p:sp>
+        <p:nvSpPr>
+          <p:cNvPr id="8" name="Text 6"/>
+          <p:cNvSpPr/>
+          <p:nvPr/>
+        </p:nvSpPr>
+        <p:spPr>
+          <a:xfrm>
+            <a:off x="502920" y="4759452"/>
+            <a:ext cx="4572000" cy="256032"/>
+          </a:xfrm>
+          <a:prstGeom prst="rect">
+            <a:avLst/>
+          </a:prstGeom>
+          <a:noFill/>
+          <a:ln/>
+        </p:spPr>
+        <p:txBody>
+          <a:bodyPr wrap="square" rtlCol="0" anchor="ctr"/>
+          <a:lstStyle/>
+          <a:p>
+            <a:pPr indent="0" marL="0">
+              <a:buNone/>
+            </a:pPr>
+            <a:r>
+              <a:rPr lang="en-US" sz="900" dirty="0">
+                <a:solidFill>
+                  <a:srgbClr val="DAD9D6"/>
+                </a:solidFill>
+                <a:latin typeface="Microsoft JhengHei" pitchFamily="34" charset="0"/>
+                <a:ea typeface="Microsoft JhengHei" pitchFamily="34" charset="-122"/>
+                <a:cs typeface="Microsoft JhengHei" pitchFamily="34" charset="-120"/>
+              </a:rPr>
+              <a:t>洲遊幣 Lite · 管理手冊 · 限授權人員</a:t>
+            </a:r>
+            <a:endParaRPr lang="en-US" sz="900" dirty="0"/>
+          </a:p>
+        </p:txBody>
+      </p:sp>
+      <p:sp>
+        <p:nvSpPr>
+          <p:cNvPr id="9" name="Shape 7"/>
+          <p:cNvSpPr/>
+          <p:nvPr/>
+        </p:nvSpPr>
+        <p:spPr>
+          <a:xfrm>
+            <a:off x="502920" y="1371600"/>
+            <a:ext cx="3913632" cy="2286000"/>
+          </a:xfrm>
+          <a:prstGeom prst="roundRect">
+            <a:avLst>
+              <a:gd name="adj" fmla="val 3200"/>
+            </a:avLst>
+          </a:prstGeom>
+          <a:solidFill>
+            <a:srgbClr val="E2E8EE"/>
+          </a:solidFill>
+          <a:ln w="12700">
+            <a:solidFill>
+              <a:srgbClr val="37536E"/>
+            </a:solidFill>
+            <a:prstDash val="solid"/>
+          </a:ln>
+        </p:spPr>
+      </p:sp>
+      <p:sp>
+        <p:nvSpPr>
+          <p:cNvPr id="10" name="Text 8"/>
+          <p:cNvSpPr/>
+          <p:nvPr/>
+        </p:nvSpPr>
+        <p:spPr>
+          <a:xfrm>
+            <a:off x="731520" y="1517904"/>
+            <a:ext cx="3474720" cy="320040"/>
+          </a:xfrm>
+          <a:prstGeom prst="rect">
+            <a:avLst/>
+          </a:prstGeom>
+          <a:noFill/>
+          <a:ln/>
+        </p:spPr>
+        <p:txBody>
+          <a:bodyPr wrap="square" rtlCol="0" anchor="ctr"/>
+          <a:lstStyle/>
+          <a:p>
+            <a:pPr indent="0" marL="0">
+              <a:buNone/>
+            </a:pPr>
+            <a:r>
+              <a:rPr lang="en-US" sz="1500" b="1" dirty="0">
+                <a:solidFill>
+                  <a:srgbClr val="37536E"/>
+                </a:solidFill>
+                <a:latin typeface="Microsoft JhengHei" pitchFamily="34" charset="0"/>
+                <a:ea typeface="Microsoft JhengHei" pitchFamily="34" charset="-122"/>
+                <a:cs typeface="Microsoft JhengHei" pitchFamily="34" charset="-120"/>
+              </a:rPr>
+              <a:t>🔵 臺北洲際 —— 全部 6 項</a:t>
+            </a:r>
+            <a:endParaRPr lang="en-US" sz="1500" dirty="0"/>
+          </a:p>
+        </p:txBody>
+      </p:sp>
+      <p:sp>
+        <p:nvSpPr>
+          <p:cNvPr id="11" name="Text 9"/>
+          <p:cNvSpPr/>
+          <p:nvPr/>
+        </p:nvSpPr>
+        <p:spPr>
+          <a:xfrm>
+            <a:off x="731520" y="1883664"/>
+            <a:ext cx="3474720" cy="1645920"/>
+          </a:xfrm>
+          <a:prstGeom prst="rect">
+            <a:avLst/>
+          </a:prstGeom>
+          <a:noFill/>
+          <a:ln/>
+        </p:spPr>
+        <p:txBody>
+          <a:bodyPr wrap="square" rtlCol="0" anchor="ctr"/>
+          <a:lstStyle/>
+          <a:p>
+            <a:pPr indent="0" marL="0">
+              <a:lnSpc>
+                <a:spcPts val="1800"/>
+              </a:lnSpc>
+              <a:buNone/>
+            </a:pPr>
+            <a:r>
+              <a:rPr lang="en-US" sz="1150" b="1" dirty="0">
+                <a:solidFill>
+                  <a:srgbClr val="3D3935"/>
+                </a:solidFill>
+                <a:latin typeface="Microsoft JhengHei" pitchFamily="34" charset="0"/>
+                <a:ea typeface="Microsoft JhengHei" pitchFamily="34" charset="-122"/>
+                <a:cs typeface="Microsoft JhengHei" pitchFamily="34" charset="-120"/>
+              </a:rPr>
+              <a:t>原因：兌換細則尚未定案
+</a:t>
+            </a:r>
+            <a:pPr indent="0" marL="0">
+              <a:lnSpc>
+                <a:spcPts val="1800"/>
+              </a:lnSpc>
+              <a:buNone/>
+            </a:pPr>
+            <a:r>
+              <a:rPr lang="en-US" sz="1150" dirty="0">
+                <a:solidFill>
+                  <a:srgbClr val="3D3935"/>
+                </a:solidFill>
+                <a:latin typeface="Microsoft JhengHei" pitchFamily="34" charset="0"/>
+                <a:ea typeface="Microsoft JhengHei" pitchFamily="34" charset="-122"/>
+                <a:cs typeface="Microsoft JhengHei" pitchFamily="34" charset="-120"/>
+              </a:rPr>
+              <a:t>（Excel 細則欄全寫「待酒店開幕後公告」）
+</a:t>
+            </a:r>
+            <a:pPr indent="0" marL="0">
+              <a:lnSpc>
+                <a:spcPts val="1800"/>
+              </a:lnSpc>
+              <a:buNone/>
+            </a:pPr>
+            <a:r>
+              <a:rPr lang="en-US" sz="1150" dirty="0">
+                <a:solidFill>
+                  <a:srgbClr val="3D3935"/>
+                </a:solidFill>
+                <a:latin typeface="Microsoft JhengHei" pitchFamily="34" charset="0"/>
+                <a:ea typeface="Microsoft JhengHei" pitchFamily="34" charset="-122"/>
+                <a:cs typeface="Microsoft JhengHei" pitchFamily="34" charset="-120"/>
+              </a:rPr>
+              <a:t>加上臺北是另一個 OA，我們沒有它的推播權限，技術上也發不出券。</a:t>
+            </a:r>
+            <a:endParaRPr lang="en-US" sz="1150" dirty="0"/>
+          </a:p>
+        </p:txBody>
+      </p:sp>
+      <p:sp>
+        <p:nvSpPr>
+          <p:cNvPr id="12" name="Shape 10"/>
+          <p:cNvSpPr/>
+          <p:nvPr/>
+        </p:nvSpPr>
+        <p:spPr>
+          <a:xfrm>
+            <a:off x="4727448" y="1371600"/>
+            <a:ext cx="3913632" cy="2286000"/>
+          </a:xfrm>
+          <a:prstGeom prst="roundRect">
+            <a:avLst>
+              <a:gd name="adj" fmla="val 3200"/>
+            </a:avLst>
+          </a:prstGeom>
+          <a:solidFill>
+            <a:srgbClr val="EFE7D6"/>
+          </a:solidFill>
+          <a:ln w="12700">
+            <a:solidFill>
+              <a:srgbClr val="7A5B12"/>
+            </a:solidFill>
+            <a:prstDash val="solid"/>
+          </a:ln>
+        </p:spPr>
+      </p:sp>
+      <p:sp>
+        <p:nvSpPr>
+          <p:cNvPr id="13" name="Text 11"/>
+          <p:cNvSpPr/>
+          <p:nvPr/>
+        </p:nvSpPr>
+        <p:spPr>
+          <a:xfrm>
+            <a:off x="4956048" y="1517904"/>
+            <a:ext cx="3474720" cy="320040"/>
+          </a:xfrm>
+          <a:prstGeom prst="rect">
+            <a:avLst/>
+          </a:prstGeom>
+          <a:noFill/>
+          <a:ln/>
+        </p:spPr>
+        <p:txBody>
+          <a:bodyPr wrap="square" rtlCol="0" anchor="ctr"/>
+          <a:lstStyle/>
+          <a:p>
+            <a:pPr indent="0" marL="0">
+              <a:buNone/>
+            </a:pPr>
+            <a:r>
+              <a:rPr lang="en-US" sz="1500" b="1" dirty="0">
+                <a:solidFill>
+                  <a:srgbClr val="7A5B12"/>
+                </a:solidFill>
+                <a:latin typeface="Microsoft JhengHei" pitchFamily="34" charset="0"/>
+                <a:ea typeface="Microsoft JhengHei" pitchFamily="34" charset="-122"/>
+                <a:cs typeface="Microsoft JhengHei" pitchFamily="34" charset="-120"/>
+              </a:rPr>
+              <a:t>🟡 高雄洲際 —— 只有這 2 項</a:t>
+            </a:r>
+            <a:endParaRPr lang="en-US" sz="1500" dirty="0"/>
+          </a:p>
+        </p:txBody>
+      </p:sp>
+      <p:sp>
+        <p:nvSpPr>
+          <p:cNvPr id="14" name="Text 12"/>
+          <p:cNvSpPr/>
+          <p:nvPr/>
+        </p:nvSpPr>
+        <p:spPr>
+          <a:xfrm>
+            <a:off x="4956048" y="1883664"/>
+            <a:ext cx="3474720" cy="1645920"/>
+          </a:xfrm>
+          <a:prstGeom prst="rect">
+            <a:avLst/>
+          </a:prstGeom>
+          <a:noFill/>
+          <a:ln/>
+        </p:spPr>
+        <p:txBody>
+          <a:bodyPr wrap="square" rtlCol="0" anchor="ctr"/>
+          <a:lstStyle/>
+          <a:p>
+            <a:pPr indent="0" marL="0">
+              <a:lnSpc>
+                <a:spcPts val="1700"/>
+              </a:lnSpc>
+              <a:buNone/>
+            </a:pPr>
+            <a:r>
+              <a:rPr lang="en-US" sz="1150" b="1" dirty="0">
+                <a:solidFill>
+                  <a:srgbClr val="3D3935"/>
+                </a:solidFill>
+                <a:latin typeface="Microsoft JhengHei" pitchFamily="34" charset="0"/>
+                <a:ea typeface="Microsoft JhengHei" pitchFamily="34" charset="-122"/>
+                <a:cs typeface="Microsoft JhengHei" pitchFamily="34" charset="-120"/>
+              </a:rPr>
+              <a:t>kh-5-1 港灣海景開放式套房
+</a:t>
+            </a:r>
+            <a:pPr indent="0" marL="0">
+              <a:lnSpc>
+                <a:spcPts val="1700"/>
+              </a:lnSpc>
+              <a:buNone/>
+            </a:pPr>
+            <a:r>
+              <a:rPr lang="en-US" sz="1150" b="1" dirty="0">
+                <a:solidFill>
+                  <a:srgbClr val="3D3935"/>
+                </a:solidFill>
+                <a:latin typeface="Microsoft JhengHei" pitchFamily="34" charset="0"/>
+                <a:ea typeface="Microsoft JhengHei" pitchFamily="34" charset="-122"/>
+                <a:cs typeface="Microsoft JhengHei" pitchFamily="34" charset="-120"/>
+              </a:rPr>
+              <a:t>kh-5-2 豪華經典房
+</a:t>
+            </a:r>
+            <a:pPr indent="0" marL="0">
+              <a:lnSpc>
+                <a:spcPts val="1700"/>
+              </a:lnSpc>
+              <a:buNone/>
+            </a:pPr>
+            <a:r>
+              <a:rPr lang="en-US" sz="1150" dirty="0">
+                <a:solidFill>
+                  <a:srgbClr val="3D3935"/>
+                </a:solidFill>
+                <a:latin typeface="Microsoft JhengHei" pitchFamily="34" charset="0"/>
+                <a:ea typeface="Microsoft JhengHei" pitchFamily="34" charset="-122"/>
+                <a:cs typeface="Microsoft JhengHei" pitchFamily="34" charset="-120"/>
+              </a:rPr>
+              <a:t>（皆為住宿一晚・含雙人早餐）
+</a:t>
+            </a:r>
+            <a:pPr indent="0" marL="0">
+              <a:lnSpc>
+                <a:spcPts val="1700"/>
+              </a:lnSpc>
+              <a:buNone/>
+            </a:pPr>
+            <a:r>
+              <a:rPr lang="en-US" sz="1150" dirty="0">
+                <a:solidFill>
+                  <a:srgbClr val="3D3935"/>
+                </a:solidFill>
+                <a:latin typeface="Microsoft JhengHei" pitchFamily="34" charset="0"/>
+                <a:ea typeface="Microsoft JhengHei" pitchFamily="34" charset="-122"/>
+                <a:cs typeface="Microsoft JhengHei" pitchFamily="34" charset="-120"/>
+              </a:rPr>
+              <a:t>原因：要安排入住日期與房型，不是拿張券到櫃檯就能換。</a:t>
+            </a:r>
+            <a:endParaRPr lang="en-US" sz="1150" dirty="0"/>
+          </a:p>
+        </p:txBody>
+      </p:sp>
+      <p:sp>
+        <p:nvSpPr>
+          <p:cNvPr id="15" name="Shape 13"/>
+          <p:cNvSpPr/>
+          <p:nvPr/>
+        </p:nvSpPr>
+        <p:spPr>
+          <a:xfrm>
+            <a:off x="502920" y="3840480"/>
+            <a:ext cx="8138160" cy="658368"/>
+          </a:xfrm>
+          <a:prstGeom prst="roundRect">
+            <a:avLst>
+              <a:gd name="adj" fmla="val 8333"/>
+            </a:avLst>
+          </a:prstGeom>
+          <a:solidFill>
+            <a:srgbClr val="ECFDF5"/>
+          </a:solidFill>
+          <a:ln w="9525">
+            <a:solidFill>
+              <a:srgbClr val="065F46"/>
+            </a:solidFill>
+            <a:prstDash val="solid"/>
+          </a:ln>
+        </p:spPr>
+      </p:sp>
+      <p:sp>
+        <p:nvSpPr>
+          <p:cNvPr id="16" name="Text 14"/>
+          <p:cNvSpPr/>
+          <p:nvPr/>
+        </p:nvSpPr>
+        <p:spPr>
+          <a:xfrm>
+            <a:off x="667512" y="3895344"/>
+            <a:ext cx="7808976" cy="548640"/>
+          </a:xfrm>
+          <a:prstGeom prst="rect">
+            <a:avLst/>
+          </a:prstGeom>
+          <a:noFill/>
+          <a:ln/>
+        </p:spPr>
+        <p:txBody>
+          <a:bodyPr wrap="square" rtlCol="0" anchor="ctr"/>
+          <a:lstStyle/>
+          <a:p>
+            <a:pPr indent="0" marL="0">
+              <a:buNone/>
+            </a:pPr>
+            <a:r>
+              <a:rPr lang="en-US" sz="1300" dirty="0">
+                <a:solidFill>
+                  <a:srgbClr val="065F46"/>
+                </a:solidFill>
+                <a:latin typeface="Microsoft JhengHei" pitchFamily="34" charset="0"/>
+                <a:ea typeface="Microsoft JhengHei" pitchFamily="34" charset="-122"/>
+                <a:cs typeface="Microsoft JhengHei" pitchFamily="34" charset="-120"/>
+              </a:rPr>
+              <a:t>✅  </a:t>
+            </a:r>
+            <a:pPr indent="0" marL="0">
+              <a:buNone/>
+            </a:pPr>
+            <a:r>
+              <a:rPr lang="en-US" sz="1150" dirty="0">
+                <a:solidFill>
+                  <a:srgbClr val="065F46"/>
+                </a:solidFill>
+                <a:latin typeface="Microsoft JhengHei" pitchFamily="34" charset="0"/>
+                <a:ea typeface="Microsoft JhengHei" pitchFamily="34" charset="-122"/>
+                <a:cs typeface="Microsoft JhengHei" pitchFamily="34" charset="-120"/>
+              </a:rPr>
+              <a:t>高雄的其他 9 個獎項一律照常發 Omnichat 券。表單會依獎品所屬飯店顯示對應的標誌與名稱。</a:t>
+            </a:r>
+            <a:endParaRPr lang="en-US" sz="1150" dirty="0"/>
+          </a:p>
+        </p:txBody>
+      </p:sp>
+    </p:spTree>
+  </p:cSld>
+  <p:clrMapOvr>
+    <a:masterClrMapping/>
+  </p:clrMapOvr>
+</p:sld>
+</file>
+
+<file path=ppt/slides/slide4.xml><?xml version="1.0" encoding="utf-8"?>
+<p:sld xmlns:a="http://schemas.openxmlformats.org/drawingml/2006/main" xmlns:r="http://schemas.openxmlformats.org/officeDocument/2006/relationships" xmlns:p="http://schemas.openxmlformats.org/presentationml/2006/main">
+  <p:cSld name="Slide 4">
     <p:bg>
       <p:bgPr>
         <a:solidFill>
@@ -3719,7 +6405,7 @@
                 <a:ea typeface="Microsoft JhengHei" pitchFamily="34" charset="-122"/>
                 <a:cs typeface="Microsoft JhengHei" pitchFamily="34" charset="-120"/>
               </a:rPr>
-              <a:t>2</a:t>
+              <a:t>3</a:t>
             </a:r>
             <a:endParaRPr lang="en-US" sz="1000" dirty="0"/>
           </a:p>
@@ -3766,7 +6452,7 @@
       </p:sp>
       <p:graphicFrame>
         <p:nvGraphicFramePr>
-          <p:cNvPr id="4" name="Table 0"/>
+          <p:cNvPr id="5" name="Table 0"/>
           <p:cNvGraphicFramePr>
             <a:graphicFrameLocks noGrp="1"/>
           </p:cNvGraphicFramePr>
@@ -3946,7 +6632,7 @@
                           <a:ea typeface="Microsoft JhengHei" pitchFamily="34" charset="-122"/>
                           <a:cs typeface="Microsoft JhengHei" pitchFamily="34" charset="-120"/>
                         </a:rPr>
-                        <a:t>臺北待聯繫</a:t>
+                        <a:t>待聯繫名單</a:t>
                       </a:r>
                       <a:endParaRPr lang="en-US" sz="1100" dirty="0">
                         <a:latin typeface="Microsoft JhengHei" charset="0"/>
@@ -4014,7 +6700,7 @@
                           <a:ea typeface="Microsoft JhengHei" pitchFamily="34" charset="-122"/>
                           <a:cs typeface="Microsoft JhengHei" pitchFamily="34" charset="-120"/>
                         </a:rPr>
-                        <a:t>臺北的人照這份聯繫。篩「只看未填」的那些不用人工催 —— 客人下次開遊戲系統會自動再問</a:t>
+                        <a:t>有「由誰聯繫」欄可依館別篩，各館認領自己的。篩「只看未填」的不用人工催 —— 客人下次開遊戲會自動再問</a:t>
                       </a:r>
                       <a:endParaRPr lang="en-US" sz="1100" dirty="0">
                         <a:latin typeface="Microsoft JhengHei" charset="0"/>
@@ -4459,7 +7145,7 @@
                 <a:ea typeface="Microsoft JhengHei" pitchFamily="34" charset="-122"/>
                 <a:cs typeface="Microsoft JhengHei" pitchFamily="34" charset="-120"/>
               </a:rPr>
-              <a:t>臺北待聯繫</a:t>
+              <a:t>待聯繫</a:t>
             </a:r>
             <a:endParaRPr lang="en-US" sz="1150" dirty="0"/>
           </a:p>
@@ -4476,7 +7162,7 @@
                 <a:ea typeface="Microsoft JhengHei" pitchFamily="34" charset="-122"/>
                 <a:cs typeface="Microsoft JhengHei" pitchFamily="34" charset="-120"/>
               </a:rPr>
-              <a:t>中了臺北獎但還沒留聯絡資訊</a:t>
+              <a:t>中了 contact 類獎項但還沒留資料</a:t>
             </a:r>
             <a:endParaRPr lang="en-US" sz="1150" dirty="0"/>
           </a:p>
@@ -4587,9 +7273,9 @@
 </p:sld>
 </file>
 
-<file path=ppt/slides/slide4.xml><?xml version="1.0" encoding="utf-8"?>
+<file path=ppt/slides/slide5.xml><?xml version="1.0" encoding="utf-8"?>
 <p:sld xmlns:a="http://schemas.openxmlformats.org/drawingml/2006/main" xmlns:r="http://schemas.openxmlformats.org/officeDocument/2006/relationships" xmlns:p="http://schemas.openxmlformats.org/presentationml/2006/main">
-  <p:cSld name="Slide 4">
+  <p:cSld name="Slide 5">
     <p:bg>
       <p:bgPr>
         <a:solidFill>
@@ -4808,7 +7494,7 @@
                 <a:ea typeface="Microsoft JhengHei" pitchFamily="34" charset="-122"/>
                 <a:cs typeface="Microsoft JhengHei" pitchFamily="34" charset="-120"/>
               </a:rPr>
-              <a:t>3</a:t>
+              <a:t>4</a:t>
             </a:r>
             <a:endParaRPr lang="en-US" sz="1000" dirty="0"/>
           </a:p>
@@ -4855,7 +7541,7 @@
       </p:sp>
       <p:graphicFrame>
         <p:nvGraphicFramePr>
-          <p:cNvPr id="5" name="Table 0"/>
+          <p:cNvPr id="6" name="Table 0"/>
           <p:cNvGraphicFramePr>
             <a:graphicFrameLocks noGrp="1"/>
           </p:cNvGraphicFramePr>
@@ -8656,9 +11342,9 @@
 </p:sld>
 </file>
 
-<file path=ppt/slides/slide5.xml><?xml version="1.0" encoding="utf-8"?>
+<file path=ppt/slides/slide6.xml><?xml version="1.0" encoding="utf-8"?>
 <p:sld xmlns:a="http://schemas.openxmlformats.org/drawingml/2006/main" xmlns:r="http://schemas.openxmlformats.org/officeDocument/2006/relationships" xmlns:p="http://schemas.openxmlformats.org/presentationml/2006/main">
-  <p:cSld name="Slide 5">
+  <p:cSld name="Slide 6">
     <p:bg>
       <p:bgPr>
         <a:solidFill>
@@ -8838,7 +11524,7 @@
                 <a:ea typeface="Microsoft JhengHei" pitchFamily="34" charset="-122"/>
                 <a:cs typeface="Microsoft JhengHei" pitchFamily="34" charset="-120"/>
               </a:rPr>
-              <a:t>4</a:t>
+              <a:t>5</a:t>
             </a:r>
             <a:endParaRPr lang="en-US" sz="1000" dirty="0"/>
           </a:p>
@@ -9060,7 +11746,7 @@
       </p:sp>
       <p:graphicFrame>
         <p:nvGraphicFramePr>
-          <p:cNvPr id="6" name="Table 0"/>
+          <p:cNvPr id="7" name="Table 0"/>
           <p:cNvGraphicFramePr>
             <a:graphicFrameLocks noGrp="1"/>
           </p:cNvGraphicFramePr>
@@ -10001,9 +12687,9 @@
 </p:sld>
 </file>
 
-<file path=ppt/slides/slide6.xml><?xml version="1.0" encoding="utf-8"?>
+<file path=ppt/slides/slide7.xml><?xml version="1.0" encoding="utf-8"?>
 <p:sld xmlns:a="http://schemas.openxmlformats.org/drawingml/2006/main" xmlns:r="http://schemas.openxmlformats.org/officeDocument/2006/relationships" xmlns:p="http://schemas.openxmlformats.org/presentationml/2006/main">
-  <p:cSld name="Slide 6">
+  <p:cSld name="Slide 7">
     <p:bg>
       <p:bgPr>
         <a:solidFill>
@@ -10222,7 +12908,7 @@
                 <a:ea typeface="Microsoft JhengHei" pitchFamily="34" charset="-122"/>
                 <a:cs typeface="Microsoft JhengHei" pitchFamily="34" charset="-120"/>
               </a:rPr>
-              <a:t>5</a:t>
+              <a:t>6</a:t>
             </a:r>
             <a:endParaRPr lang="en-US" sz="1000" dirty="0"/>
           </a:p>
@@ -10269,7 +12955,7 @@
       </p:sp>
       <p:graphicFrame>
         <p:nvGraphicFramePr>
-          <p:cNvPr id="7" name="Table 0"/>
+          <p:cNvPr id="8" name="Table 0"/>
           <p:cNvGraphicFramePr>
             <a:graphicFrameLocks noGrp="1"/>
           </p:cNvGraphicFramePr>
@@ -11433,9 +14119,9 @@
 </p:sld>
 </file>
 
-<file path=ppt/slides/slide7.xml><?xml version="1.0" encoding="utf-8"?>
+<file path=ppt/slides/slide8.xml><?xml version="1.0" encoding="utf-8"?>
 <p:sld xmlns:a="http://schemas.openxmlformats.org/drawingml/2006/main" xmlns:r="http://schemas.openxmlformats.org/officeDocument/2006/relationships" xmlns:p="http://schemas.openxmlformats.org/presentationml/2006/main">
-  <p:cSld name="Slide 7">
+  <p:cSld name="Slide 8">
     <p:bg>
       <p:bgPr>
         <a:solidFill>
@@ -11615,7 +14301,7 @@
                 <a:ea typeface="Microsoft JhengHei" pitchFamily="34" charset="-122"/>
                 <a:cs typeface="Microsoft JhengHei" pitchFamily="34" charset="-120"/>
               </a:rPr>
-              <a:t>6</a:t>
+              <a:t>7</a:t>
             </a:r>
             <a:endParaRPr lang="en-US" sz="1000" dirty="0"/>
           </a:p>
@@ -11662,7 +14348,7 @@
       </p:sp>
       <p:graphicFrame>
         <p:nvGraphicFramePr>
-          <p:cNvPr id="8" name="Table 0"/>
+          <p:cNvPr id="9" name="Table 0"/>
           <p:cNvGraphicFramePr>
             <a:graphicFrameLocks noGrp="1"/>
           </p:cNvGraphicFramePr>
@@ -12623,9 +15309,9 @@
 </p:sld>
 </file>
 
-<file path=ppt/slides/slide8.xml><?xml version="1.0" encoding="utf-8"?>
+<file path=ppt/slides/slide9.xml><?xml version="1.0" encoding="utf-8"?>
 <p:sld xmlns:a="http://schemas.openxmlformats.org/drawingml/2006/main" xmlns:r="http://schemas.openxmlformats.org/officeDocument/2006/relationships" xmlns:p="http://schemas.openxmlformats.org/presentationml/2006/main">
-  <p:cSld name="Slide 8">
+  <p:cSld name="Slide 9">
     <p:bg>
       <p:bgPr>
         <a:solidFill>
@@ -12844,7 +15530,7 @@
                 <a:ea typeface="Microsoft JhengHei" pitchFamily="34" charset="-122"/>
                 <a:cs typeface="Microsoft JhengHei" pitchFamily="34" charset="-120"/>
               </a:rPr>
-              <a:t>7</a:t>
+              <a:t>8</a:t>
             </a:r>
             <a:endParaRPr lang="en-US" sz="1000" dirty="0"/>
           </a:p>
@@ -13178,1237 +15864,6 @@
 </p:sld>
 </file>
 
-<file path=ppt/slides/slide9.xml><?xml version="1.0" encoding="utf-8"?>
-<p:sld xmlns:a="http://schemas.openxmlformats.org/drawingml/2006/main" xmlns:r="http://schemas.openxmlformats.org/officeDocument/2006/relationships" xmlns:p="http://schemas.openxmlformats.org/presentationml/2006/main">
-  <p:cSld name="Slide 9">
-    <p:bg>
-      <p:bgPr>
-        <a:solidFill>
-          <a:srgbClr val="FAF8F6"/>
-        </a:solidFill>
-      </p:bgPr>
-    </p:bg>
-    <p:spTree>
-      <p:nvGrpSpPr>
-        <p:cNvPr id="1" name=""/>
-        <p:cNvGrpSpPr/>
-        <p:nvPr/>
-      </p:nvGrpSpPr>
-      <p:grpSpPr>
-        <a:xfrm>
-          <a:off x="0" y="0"/>
-          <a:ext cx="0" cy="0"/>
-          <a:chOff x="0" y="0"/>
-          <a:chExt cx="0" cy="0"/>
-        </a:xfrm>
-      </p:grpSpPr>
-      <p:sp>
-        <p:nvSpPr>
-          <p:cNvPr id="2" name="Text 0"/>
-          <p:cNvSpPr/>
-          <p:nvPr/>
-        </p:nvSpPr>
-        <p:spPr>
-          <a:xfrm>
-            <a:off x="502920" y="310896"/>
-            <a:ext cx="6949440" cy="457200"/>
-          </a:xfrm>
-          <a:prstGeom prst="rect">
-            <a:avLst/>
-          </a:prstGeom>
-          <a:noFill/>
-          <a:ln/>
-        </p:spPr>
-        <p:txBody>
-          <a:bodyPr wrap="square" rtlCol="0" anchor="ctr"/>
-          <a:lstStyle/>
-          <a:p>
-            <a:pPr indent="0" marL="0">
-              <a:buNone/>
-            </a:pPr>
-            <a:r>
-              <a:rPr lang="en-US" sz="2400" b="1" dirty="0">
-                <a:solidFill>
-                  <a:srgbClr val="3D3935"/>
-                </a:solidFill>
-                <a:latin typeface="Microsoft JhengHei" pitchFamily="34" charset="0"/>
-                <a:ea typeface="Microsoft JhengHei" pitchFamily="34" charset="-122"/>
-                <a:cs typeface="Microsoft JhengHei" pitchFamily="34" charset="-120"/>
-              </a:rPr>
-              <a:t>七、狀況處理</a:t>
-            </a:r>
-            <a:endParaRPr lang="en-US" sz="2400" dirty="0"/>
-          </a:p>
-        </p:txBody>
-      </p:sp>
-      <p:sp>
-        <p:nvSpPr>
-          <p:cNvPr id="3" name="Shape 1"/>
-          <p:cNvSpPr/>
-          <p:nvPr/>
-        </p:nvSpPr>
-        <p:spPr>
-          <a:xfrm>
-            <a:off x="502920" y="822960"/>
-            <a:ext cx="502920" cy="41148"/>
-          </a:xfrm>
-          <a:prstGeom prst="rect">
-            <a:avLst/>
-          </a:prstGeom>
-          <a:solidFill>
-            <a:srgbClr val="935D08"/>
-          </a:solidFill>
-          <a:ln/>
-        </p:spPr>
-      </p:sp>
-      <p:sp>
-        <p:nvSpPr>
-          <p:cNvPr id="4" name="Shape 2"/>
-          <p:cNvSpPr/>
-          <p:nvPr/>
-        </p:nvSpPr>
-        <p:spPr>
-          <a:xfrm>
-            <a:off x="7635240" y="310896"/>
-            <a:ext cx="1005840" cy="292608"/>
-          </a:xfrm>
-          <a:prstGeom prst="roundRect">
-            <a:avLst>
-              <a:gd name="adj" fmla="val 15625"/>
-            </a:avLst>
-          </a:prstGeom>
-          <a:solidFill>
-            <a:srgbClr val="FEF2F2"/>
-          </a:solidFill>
-          <a:ln w="9525">
-            <a:solidFill>
-              <a:srgbClr val="991B1B"/>
-            </a:solidFill>
-            <a:prstDash val="solid"/>
-          </a:ln>
-        </p:spPr>
-      </p:sp>
-      <p:sp>
-        <p:nvSpPr>
-          <p:cNvPr id="5" name="Text 3"/>
-          <p:cNvSpPr/>
-          <p:nvPr/>
-        </p:nvSpPr>
-        <p:spPr>
-          <a:xfrm>
-            <a:off x="7635240" y="310896"/>
-            <a:ext cx="1005840" cy="292608"/>
-          </a:xfrm>
-          <a:prstGeom prst="rect">
-            <a:avLst/>
-          </a:prstGeom>
-          <a:noFill/>
-          <a:ln/>
-        </p:spPr>
-        <p:txBody>
-          <a:bodyPr wrap="square" rtlCol="0" anchor="ctr"/>
-          <a:lstStyle/>
-          <a:p>
-            <a:pPr algn="ctr" indent="0" marL="0">
-              <a:buNone/>
-            </a:pPr>
-            <a:r>
-              <a:rPr lang="en-US" sz="1050" b="1" dirty="0">
-                <a:solidFill>
-                  <a:srgbClr val="991B1B"/>
-                </a:solidFill>
-                <a:latin typeface="Microsoft JhengHei" pitchFamily="34" charset="0"/>
-                <a:ea typeface="Microsoft JhengHei" pitchFamily="34" charset="-122"/>
-                <a:cs typeface="Microsoft JhengHei" pitchFamily="34" charset="-120"/>
-              </a:rPr>
-              <a:t>🔒 機密</a:t>
-            </a:r>
-            <a:endParaRPr lang="en-US" sz="1050" dirty="0"/>
-          </a:p>
-        </p:txBody>
-      </p:sp>
-      <p:sp>
-        <p:nvSpPr>
-          <p:cNvPr id="6" name="Text 4"/>
-          <p:cNvSpPr/>
-          <p:nvPr/>
-        </p:nvSpPr>
-        <p:spPr>
-          <a:xfrm>
-            <a:off x="8321040" y="4759452"/>
-            <a:ext cx="457200" cy="256032"/>
-          </a:xfrm>
-          <a:prstGeom prst="rect">
-            <a:avLst/>
-          </a:prstGeom>
-          <a:noFill/>
-          <a:ln/>
-        </p:spPr>
-        <p:txBody>
-          <a:bodyPr wrap="square" rtlCol="0" anchor="ctr"/>
-          <a:lstStyle/>
-          <a:p>
-            <a:pPr algn="r" indent="0" marL="0">
-              <a:buNone/>
-            </a:pPr>
-            <a:r>
-              <a:rPr lang="en-US" sz="1000" dirty="0">
-                <a:solidFill>
-                  <a:srgbClr val="DAD9D6"/>
-                </a:solidFill>
-                <a:latin typeface="Microsoft JhengHei" pitchFamily="34" charset="0"/>
-                <a:ea typeface="Microsoft JhengHei" pitchFamily="34" charset="-122"/>
-                <a:cs typeface="Microsoft JhengHei" pitchFamily="34" charset="-120"/>
-              </a:rPr>
-              <a:t>8</a:t>
-            </a:r>
-            <a:endParaRPr lang="en-US" sz="1000" dirty="0"/>
-          </a:p>
-        </p:txBody>
-      </p:sp>
-      <p:sp>
-        <p:nvSpPr>
-          <p:cNvPr id="7" name="Text 5"/>
-          <p:cNvSpPr/>
-          <p:nvPr/>
-        </p:nvSpPr>
-        <p:spPr>
-          <a:xfrm>
-            <a:off x="502920" y="4759452"/>
-            <a:ext cx="4572000" cy="256032"/>
-          </a:xfrm>
-          <a:prstGeom prst="rect">
-            <a:avLst/>
-          </a:prstGeom>
-          <a:noFill/>
-          <a:ln/>
-        </p:spPr>
-        <p:txBody>
-          <a:bodyPr wrap="square" rtlCol="0" anchor="ctr"/>
-          <a:lstStyle/>
-          <a:p>
-            <a:pPr indent="0" marL="0">
-              <a:buNone/>
-            </a:pPr>
-            <a:r>
-              <a:rPr lang="en-US" sz="900" dirty="0">
-                <a:solidFill>
-                  <a:srgbClr val="DAD9D6"/>
-                </a:solidFill>
-                <a:latin typeface="Microsoft JhengHei" pitchFamily="34" charset="0"/>
-                <a:ea typeface="Microsoft JhengHei" pitchFamily="34" charset="-122"/>
-                <a:cs typeface="Microsoft JhengHei" pitchFamily="34" charset="-120"/>
-              </a:rPr>
-              <a:t>洲遊幣 Lite · 管理手冊 · 限授權人員</a:t>
-            </a:r>
-            <a:endParaRPr lang="en-US" sz="900" dirty="0"/>
-          </a:p>
-        </p:txBody>
-      </p:sp>
-      <p:graphicFrame>
-        <p:nvGraphicFramePr>
-          <p:cNvPr id="10" name="Table 0"/>
-          <p:cNvGraphicFramePr>
-            <a:graphicFrameLocks noGrp="1"/>
-          </p:cNvGraphicFramePr>
-          <p:nvPr>
-            <p:extLst>
-              <p:ext uri="{D42A27DB-BD31-4B8C-83A1-F6EECF244321}">
-                <p14:modId xmlns:p14="http://schemas.microsoft.com/office/powerpoint/2010/main" val="1579011935"/>
-              </p:ext>
-            </p:extLst>
-          </p:nvPr>
-        </p:nvGraphicFramePr>
-        <p:xfrm>
-          <a:off x="502920" y="1371600"/>
-          <a:ext cx="8138160" cy="914400"/>
-        </p:xfrm>
-        <a:graphic>
-          <a:graphicData uri="http://schemas.openxmlformats.org/drawingml/2006/table">
-            <a:tbl>
-              <a:tblPr/>
-              <a:tblGrid>
-                <a:gridCol w="2468880"/>
-                <a:gridCol w="5669280"/>
-              </a:tblGrid>
-              <a:tr h="457200">
-                <a:tc>
-                  <a:txBody>
-                    <a:bodyPr/>
-                    <a:lstStyle/>
-                    <a:p>
-                      <a:pPr indent="0" marL="0">
-                        <a:buNone/>
-                      </a:pPr>
-                      <a:r>
-                        <a:rPr lang="en-US" sz="1100" b="1" dirty="0">
-                          <a:solidFill>
-                            <a:srgbClr val="3D3935"/>
-                          </a:solidFill>
-                          <a:latin typeface="Microsoft JhengHei" pitchFamily="34" charset="0"/>
-                          <a:ea typeface="Microsoft JhengHei" pitchFamily="34" charset="-122"/>
-                          <a:cs typeface="Microsoft JhengHei" pitchFamily="34" charset="-120"/>
-                        </a:rPr>
-                        <a:t>狀況</a:t>
-                      </a:r>
-                      <a:endParaRPr lang="en-US" sz="1100" dirty="0">
-                        <a:latin typeface="Microsoft JhengHei" charset="0"/>
-                        <a:ea typeface="Microsoft JhengHei" charset="0"/>
-                        <a:cs typeface="Microsoft JhengHei" charset="0"/>
-                      </a:endParaRPr>
-                    </a:p>
-                  </a:txBody>
-                  <a:tcPr marL="91440" marR="91440" marT="45720" marB="45720" anchor="ctr">
-                    <a:lnL w="6350" cap="flat" cmpd="sng" algn="ctr">
-                      <a:solidFill>
-                        <a:srgbClr val="DAD9D6"/>
-                      </a:solidFill>
-                      <a:prstDash val="solid"/>
-                      <a:round/>
-                      <a:headEnd type="none" w="med" len="med"/>
-                      <a:tailEnd type="none" w="med" len="med"/>
-                    </a:lnL>
-                    <a:lnR w="6350" cap="flat" cmpd="sng" algn="ctr">
-                      <a:solidFill>
-                        <a:srgbClr val="DAD9D6"/>
-                      </a:solidFill>
-                      <a:prstDash val="solid"/>
-                      <a:round/>
-                      <a:headEnd type="none" w="med" len="med"/>
-                      <a:tailEnd type="none" w="med" len="med"/>
-                    </a:lnR>
-                    <a:lnT w="6350" cap="flat" cmpd="sng" algn="ctr">
-                      <a:solidFill>
-                        <a:srgbClr val="DAD9D6"/>
-                      </a:solidFill>
-                      <a:prstDash val="solid"/>
-                      <a:round/>
-                      <a:headEnd type="none" w="med" len="med"/>
-                      <a:tailEnd type="none" w="med" len="med"/>
-                    </a:lnT>
-                    <a:lnB w="6350" cap="flat" cmpd="sng" algn="ctr">
-                      <a:solidFill>
-                        <a:srgbClr val="DAD9D6"/>
-                      </a:solidFill>
-                      <a:prstDash val="solid"/>
-                      <a:round/>
-                      <a:headEnd type="none" w="med" len="med"/>
-                      <a:tailEnd type="none" w="med" len="med"/>
-                    </a:lnB>
-                    <a:solidFill>
-                      <a:srgbClr val="F4ECE7"/>
-                    </a:solidFill>
-                  </a:tcPr>
-                </a:tc>
-                <a:tc>
-                  <a:txBody>
-                    <a:bodyPr/>
-                    <a:lstStyle/>
-                    <a:p>
-                      <a:pPr indent="0" marL="0">
-                        <a:buNone/>
-                      </a:pPr>
-                      <a:r>
-                        <a:rPr lang="en-US" sz="1100" b="1" dirty="0">
-                          <a:solidFill>
-                            <a:srgbClr val="3D3935"/>
-                          </a:solidFill>
-                          <a:latin typeface="Microsoft JhengHei" pitchFamily="34" charset="0"/>
-                          <a:ea typeface="Microsoft JhengHei" pitchFamily="34" charset="-122"/>
-                          <a:cs typeface="Microsoft JhengHei" pitchFamily="34" charset="-120"/>
-                        </a:rPr>
-                        <a:t>處理</a:t>
-                      </a:r>
-                      <a:endParaRPr lang="en-US" sz="1100" dirty="0">
-                        <a:latin typeface="Microsoft JhengHei" charset="0"/>
-                        <a:ea typeface="Microsoft JhengHei" charset="0"/>
-                        <a:cs typeface="Microsoft JhengHei" charset="0"/>
-                      </a:endParaRPr>
-                    </a:p>
-                  </a:txBody>
-                  <a:tcPr marL="91440" marR="91440" marT="45720" marB="45720" anchor="ctr">
-                    <a:lnL w="6350" cap="flat" cmpd="sng" algn="ctr">
-                      <a:solidFill>
-                        <a:srgbClr val="DAD9D6"/>
-                      </a:solidFill>
-                      <a:prstDash val="solid"/>
-                      <a:round/>
-                      <a:headEnd type="none" w="med" len="med"/>
-                      <a:tailEnd type="none" w="med" len="med"/>
-                    </a:lnL>
-                    <a:lnR w="6350" cap="flat" cmpd="sng" algn="ctr">
-                      <a:solidFill>
-                        <a:srgbClr val="DAD9D6"/>
-                      </a:solidFill>
-                      <a:prstDash val="solid"/>
-                      <a:round/>
-                      <a:headEnd type="none" w="med" len="med"/>
-                      <a:tailEnd type="none" w="med" len="med"/>
-                    </a:lnR>
-                    <a:lnT w="6350" cap="flat" cmpd="sng" algn="ctr">
-                      <a:solidFill>
-                        <a:srgbClr val="DAD9D6"/>
-                      </a:solidFill>
-                      <a:prstDash val="solid"/>
-                      <a:round/>
-                      <a:headEnd type="none" w="med" len="med"/>
-                      <a:tailEnd type="none" w="med" len="med"/>
-                    </a:lnT>
-                    <a:lnB w="6350" cap="flat" cmpd="sng" algn="ctr">
-                      <a:solidFill>
-                        <a:srgbClr val="DAD9D6"/>
-                      </a:solidFill>
-                      <a:prstDash val="solid"/>
-                      <a:round/>
-                      <a:headEnd type="none" w="med" len="med"/>
-                      <a:tailEnd type="none" w="med" len="med"/>
-                    </a:lnB>
-                    <a:solidFill>
-                      <a:srgbClr val="F4ECE7"/>
-                    </a:solidFill>
-                  </a:tcPr>
-                </a:tc>
-              </a:tr>
-              <a:tr h="457200">
-                <a:tc>
-                  <a:txBody>
-                    <a:bodyPr/>
-                    <a:lstStyle/>
-                    <a:p>
-                      <a:pPr indent="0" marL="0">
-                        <a:buNone/>
-                      </a:pPr>
-                      <a:r>
-                        <a:rPr lang="en-US" sz="1100" dirty="0">
-                          <a:solidFill>
-                            <a:srgbClr val="3D3935"/>
-                          </a:solidFill>
-                          <a:latin typeface="Microsoft JhengHei" pitchFamily="34" charset="0"/>
-                          <a:ea typeface="Microsoft JhengHei" pitchFamily="34" charset="-122"/>
-                          <a:cs typeface="Microsoft JhengHei" pitchFamily="34" charset="-120"/>
-                        </a:rPr>
-                        <a:t>客人沒收到券</a:t>
-                      </a:r>
-                      <a:endParaRPr lang="en-US" sz="1100" dirty="0">
-                        <a:latin typeface="Microsoft JhengHei" charset="0"/>
-                        <a:ea typeface="Microsoft JhengHei" charset="0"/>
-                        <a:cs typeface="Microsoft JhengHei" charset="0"/>
-                      </a:endParaRPr>
-                    </a:p>
-                  </a:txBody>
-                  <a:tcPr marL="91440" marR="91440" marT="45720" marB="45720" anchor="ctr">
-                    <a:lnL w="6350" cap="flat" cmpd="sng" algn="ctr">
-                      <a:solidFill>
-                        <a:srgbClr val="DAD9D6"/>
-                      </a:solidFill>
-                      <a:prstDash val="solid"/>
-                      <a:round/>
-                      <a:headEnd type="none" w="med" len="med"/>
-                      <a:tailEnd type="none" w="med" len="med"/>
-                    </a:lnL>
-                    <a:lnR w="6350" cap="flat" cmpd="sng" algn="ctr">
-                      <a:solidFill>
-                        <a:srgbClr val="DAD9D6"/>
-                      </a:solidFill>
-                      <a:prstDash val="solid"/>
-                      <a:round/>
-                      <a:headEnd type="none" w="med" len="med"/>
-                      <a:tailEnd type="none" w="med" len="med"/>
-                    </a:lnR>
-                    <a:lnT w="6350" cap="flat" cmpd="sng" algn="ctr">
-                      <a:solidFill>
-                        <a:srgbClr val="DAD9D6"/>
-                      </a:solidFill>
-                      <a:prstDash val="solid"/>
-                      <a:round/>
-                      <a:headEnd type="none" w="med" len="med"/>
-                      <a:tailEnd type="none" w="med" len="med"/>
-                    </a:lnT>
-                    <a:lnB w="6350" cap="flat" cmpd="sng" algn="ctr">
-                      <a:solidFill>
-                        <a:srgbClr val="DAD9D6"/>
-                      </a:solidFill>
-                      <a:prstDash val="solid"/>
-                      <a:round/>
-                      <a:headEnd type="none" w="med" len="med"/>
-                      <a:tailEnd type="none" w="med" len="med"/>
-                    </a:lnB>
-                    <a:solidFill>
-                      <a:srgbClr val="FFFFFF"/>
-                    </a:solidFill>
-                  </a:tcPr>
-                </a:tc>
-                <a:tc>
-                  <a:txBody>
-                    <a:bodyPr/>
-                    <a:lstStyle/>
-                    <a:p>
-                      <a:pPr indent="0" marL="0">
-                        <a:buNone/>
-                      </a:pPr>
-                      <a:r>
-                        <a:rPr lang="en-US" sz="1100" dirty="0">
-                          <a:solidFill>
-                            <a:srgbClr val="3D3935"/>
-                          </a:solidFill>
-                          <a:latin typeface="Microsoft JhengHei" pitchFamily="34" charset="0"/>
-                          <a:ea typeface="Microsoft JhengHei" pitchFamily="34" charset="-122"/>
-                          <a:cs typeface="Microsoft JhengHei" pitchFamily="34" charset="-120"/>
-                        </a:rPr>
-                        <a:t>中獎名單搜姓名／兌換碼 → 「推播失敗」→ 補送；「券未領取」→ 請他在 LINE 對話往上找</a:t>
-                      </a:r>
-                      <a:endParaRPr lang="en-US" sz="1100" dirty="0">
-                        <a:latin typeface="Microsoft JhengHei" charset="0"/>
-                        <a:ea typeface="Microsoft JhengHei" charset="0"/>
-                        <a:cs typeface="Microsoft JhengHei" charset="0"/>
-                      </a:endParaRPr>
-                    </a:p>
-                  </a:txBody>
-                  <a:tcPr marL="91440" marR="91440" marT="45720" marB="45720" anchor="ctr">
-                    <a:lnL w="6350" cap="flat" cmpd="sng" algn="ctr">
-                      <a:solidFill>
-                        <a:srgbClr val="DAD9D6"/>
-                      </a:solidFill>
-                      <a:prstDash val="solid"/>
-                      <a:round/>
-                      <a:headEnd type="none" w="med" len="med"/>
-                      <a:tailEnd type="none" w="med" len="med"/>
-                    </a:lnL>
-                    <a:lnR w="6350" cap="flat" cmpd="sng" algn="ctr">
-                      <a:solidFill>
-                        <a:srgbClr val="DAD9D6"/>
-                      </a:solidFill>
-                      <a:prstDash val="solid"/>
-                      <a:round/>
-                      <a:headEnd type="none" w="med" len="med"/>
-                      <a:tailEnd type="none" w="med" len="med"/>
-                    </a:lnR>
-                    <a:lnT w="6350" cap="flat" cmpd="sng" algn="ctr">
-                      <a:solidFill>
-                        <a:srgbClr val="DAD9D6"/>
-                      </a:solidFill>
-                      <a:prstDash val="solid"/>
-                      <a:round/>
-                      <a:headEnd type="none" w="med" len="med"/>
-                      <a:tailEnd type="none" w="med" len="med"/>
-                    </a:lnT>
-                    <a:lnB w="6350" cap="flat" cmpd="sng" algn="ctr">
-                      <a:solidFill>
-                        <a:srgbClr val="DAD9D6"/>
-                      </a:solidFill>
-                      <a:prstDash val="solid"/>
-                      <a:round/>
-                      <a:headEnd type="none" w="med" len="med"/>
-                      <a:tailEnd type="none" w="med" len="med"/>
-                    </a:lnB>
-                    <a:solidFill>
-                      <a:srgbClr val="FFFFFF"/>
-                    </a:solidFill>
-                  </a:tcPr>
-                </a:tc>
-              </a:tr>
-              <a:tr h="457200">
-                <a:tc>
-                  <a:txBody>
-                    <a:bodyPr/>
-                    <a:lstStyle/>
-                    <a:p>
-                      <a:pPr indent="0" marL="0">
-                        <a:buNone/>
-                      </a:pPr>
-                      <a:r>
-                        <a:rPr lang="en-US" sz="1100" dirty="0">
-                          <a:solidFill>
-                            <a:srgbClr val="3D3935"/>
-                          </a:solidFill>
-                          <a:latin typeface="Microsoft JhengHei" pitchFamily="34" charset="0"/>
-                          <a:ea typeface="Microsoft JhengHei" pitchFamily="34" charset="-122"/>
-                          <a:cs typeface="Microsoft JhengHei" pitchFamily="34" charset="-120"/>
-                        </a:rPr>
-                        <a:t>客人說券已使用但堅稱沒領</a:t>
-                      </a:r>
-                      <a:endParaRPr lang="en-US" sz="1100" dirty="0">
-                        <a:latin typeface="Microsoft JhengHei" charset="0"/>
-                        <a:ea typeface="Microsoft JhengHei" charset="0"/>
-                        <a:cs typeface="Microsoft JhengHei" charset="0"/>
-                      </a:endParaRPr>
-                    </a:p>
-                  </a:txBody>
-                  <a:tcPr marL="91440" marR="91440" marT="45720" marB="45720" anchor="ctr">
-                    <a:lnL w="6350" cap="flat" cmpd="sng" algn="ctr">
-                      <a:solidFill>
-                        <a:srgbClr val="DAD9D6"/>
-                      </a:solidFill>
-                      <a:prstDash val="solid"/>
-                      <a:round/>
-                      <a:headEnd type="none" w="med" len="med"/>
-                      <a:tailEnd type="none" w="med" len="med"/>
-                    </a:lnL>
-                    <a:lnR w="6350" cap="flat" cmpd="sng" algn="ctr">
-                      <a:solidFill>
-                        <a:srgbClr val="DAD9D6"/>
-                      </a:solidFill>
-                      <a:prstDash val="solid"/>
-                      <a:round/>
-                      <a:headEnd type="none" w="med" len="med"/>
-                      <a:tailEnd type="none" w="med" len="med"/>
-                    </a:lnR>
-                    <a:lnT w="6350" cap="flat" cmpd="sng" algn="ctr">
-                      <a:solidFill>
-                        <a:srgbClr val="DAD9D6"/>
-                      </a:solidFill>
-                      <a:prstDash val="solid"/>
-                      <a:round/>
-                      <a:headEnd type="none" w="med" len="med"/>
-                      <a:tailEnd type="none" w="med" len="med"/>
-                    </a:lnT>
-                    <a:lnB w="6350" cap="flat" cmpd="sng" algn="ctr">
-                      <a:solidFill>
-                        <a:srgbClr val="DAD9D6"/>
-                      </a:solidFill>
-                      <a:prstDash val="solid"/>
-                      <a:round/>
-                      <a:headEnd type="none" w="med" len="med"/>
-                      <a:tailEnd type="none" w="med" len="med"/>
-                    </a:lnB>
-                    <a:solidFill>
-                      <a:srgbClr val="FFFFFF"/>
-                    </a:solidFill>
-                  </a:tcPr>
-                </a:tc>
-                <a:tc>
-                  <a:txBody>
-                    <a:bodyPr/>
-                    <a:lstStyle/>
-                    <a:p>
-                      <a:pPr indent="0" marL="0">
-                        <a:buNone/>
-                      </a:pPr>
-                      <a:r>
-                        <a:rPr lang="en-US" sz="1100" dirty="0">
-                          <a:solidFill>
-                            <a:srgbClr val="3D3935"/>
-                          </a:solidFill>
-                          <a:latin typeface="Microsoft JhengHei" pitchFamily="34" charset="0"/>
-                          <a:ea typeface="Microsoft JhengHei" pitchFamily="34" charset="-122"/>
-                          <a:cs typeface="Microsoft JhengHei" pitchFamily="34" charset="-120"/>
-                        </a:rPr>
-                        <a:t>查 claim_used_at 時間。為防無限領取，每張券只能領一次</a:t>
-                      </a:r>
-                      <a:endParaRPr lang="en-US" sz="1100" dirty="0">
-                        <a:latin typeface="Microsoft JhengHei" charset="0"/>
-                        <a:ea typeface="Microsoft JhengHei" charset="0"/>
-                        <a:cs typeface="Microsoft JhengHei" charset="0"/>
-                      </a:endParaRPr>
-                    </a:p>
-                  </a:txBody>
-                  <a:tcPr marL="91440" marR="91440" marT="45720" marB="45720" anchor="ctr">
-                    <a:lnL w="6350" cap="flat" cmpd="sng" algn="ctr">
-                      <a:solidFill>
-                        <a:srgbClr val="DAD9D6"/>
-                      </a:solidFill>
-                      <a:prstDash val="solid"/>
-                      <a:round/>
-                      <a:headEnd type="none" w="med" len="med"/>
-                      <a:tailEnd type="none" w="med" len="med"/>
-                    </a:lnL>
-                    <a:lnR w="6350" cap="flat" cmpd="sng" algn="ctr">
-                      <a:solidFill>
-                        <a:srgbClr val="DAD9D6"/>
-                      </a:solidFill>
-                      <a:prstDash val="solid"/>
-                      <a:round/>
-                      <a:headEnd type="none" w="med" len="med"/>
-                      <a:tailEnd type="none" w="med" len="med"/>
-                    </a:lnR>
-                    <a:lnT w="6350" cap="flat" cmpd="sng" algn="ctr">
-                      <a:solidFill>
-                        <a:srgbClr val="DAD9D6"/>
-                      </a:solidFill>
-                      <a:prstDash val="solid"/>
-                      <a:round/>
-                      <a:headEnd type="none" w="med" len="med"/>
-                      <a:tailEnd type="none" w="med" len="med"/>
-                    </a:lnT>
-                    <a:lnB w="6350" cap="flat" cmpd="sng" algn="ctr">
-                      <a:solidFill>
-                        <a:srgbClr val="DAD9D6"/>
-                      </a:solidFill>
-                      <a:prstDash val="solid"/>
-                      <a:round/>
-                      <a:headEnd type="none" w="med" len="med"/>
-                      <a:tailEnd type="none" w="med" len="med"/>
-                    </a:lnB>
-                    <a:solidFill>
-                      <a:srgbClr val="FFFFFF"/>
-                    </a:solidFill>
-                  </a:tcPr>
-                </a:tc>
-              </a:tr>
-              <a:tr h="457200">
-                <a:tc>
-                  <a:txBody>
-                    <a:bodyPr/>
-                    <a:lstStyle/>
-                    <a:p>
-                      <a:pPr indent="0" marL="0">
-                        <a:buNone/>
-                      </a:pPr>
-                      <a:r>
-                        <a:rPr lang="en-US" sz="1100" dirty="0">
-                          <a:solidFill>
-                            <a:srgbClr val="3D3935"/>
-                          </a:solidFill>
-                          <a:latin typeface="Microsoft JhengHei" pitchFamily="34" charset="0"/>
-                          <a:ea typeface="Microsoft JhengHei" pitchFamily="34" charset="-122"/>
-                          <a:cs typeface="Microsoft JhengHei" pitchFamily="34" charset="-120"/>
-                        </a:rPr>
-                        <a:t>臺北中獎者遲遲沒填聯絡資訊</a:t>
-                      </a:r>
-                      <a:endParaRPr lang="en-US" sz="1100" dirty="0">
-                        <a:latin typeface="Microsoft JhengHei" charset="0"/>
-                        <a:ea typeface="Microsoft JhengHei" charset="0"/>
-                        <a:cs typeface="Microsoft JhengHei" charset="0"/>
-                      </a:endParaRPr>
-                    </a:p>
-                  </a:txBody>
-                  <a:tcPr marL="91440" marR="91440" marT="45720" marB="45720" anchor="ctr">
-                    <a:lnL w="6350" cap="flat" cmpd="sng" algn="ctr">
-                      <a:solidFill>
-                        <a:srgbClr val="DAD9D6"/>
-                      </a:solidFill>
-                      <a:prstDash val="solid"/>
-                      <a:round/>
-                      <a:headEnd type="none" w="med" len="med"/>
-                      <a:tailEnd type="none" w="med" len="med"/>
-                    </a:lnL>
-                    <a:lnR w="6350" cap="flat" cmpd="sng" algn="ctr">
-                      <a:solidFill>
-                        <a:srgbClr val="DAD9D6"/>
-                      </a:solidFill>
-                      <a:prstDash val="solid"/>
-                      <a:round/>
-                      <a:headEnd type="none" w="med" len="med"/>
-                      <a:tailEnd type="none" w="med" len="med"/>
-                    </a:lnR>
-                    <a:lnT w="6350" cap="flat" cmpd="sng" algn="ctr">
-                      <a:solidFill>
-                        <a:srgbClr val="DAD9D6"/>
-                      </a:solidFill>
-                      <a:prstDash val="solid"/>
-                      <a:round/>
-                      <a:headEnd type="none" w="med" len="med"/>
-                      <a:tailEnd type="none" w="med" len="med"/>
-                    </a:lnT>
-                    <a:lnB w="6350" cap="flat" cmpd="sng" algn="ctr">
-                      <a:solidFill>
-                        <a:srgbClr val="DAD9D6"/>
-                      </a:solidFill>
-                      <a:prstDash val="solid"/>
-                      <a:round/>
-                      <a:headEnd type="none" w="med" len="med"/>
-                      <a:tailEnd type="none" w="med" len="med"/>
-                    </a:lnB>
-                    <a:solidFill>
-                      <a:srgbClr val="FFFFFF"/>
-                    </a:solidFill>
-                  </a:tcPr>
-                </a:tc>
-                <a:tc>
-                  <a:txBody>
-                    <a:bodyPr/>
-                    <a:lstStyle/>
-                    <a:p>
-                      <a:pPr indent="0" marL="0">
-                        <a:buNone/>
-                      </a:pPr>
-                      <a:r>
-                        <a:rPr lang="en-US" sz="1100" dirty="0">
-                          <a:solidFill>
-                            <a:srgbClr val="3D3935"/>
-                          </a:solidFill>
-                          <a:latin typeface="Microsoft JhengHei" pitchFamily="34" charset="0"/>
-                          <a:ea typeface="Microsoft JhengHei" pitchFamily="34" charset="-122"/>
-                          <a:cs typeface="Microsoft JhengHei" pitchFamily="34" charset="-120"/>
-                        </a:rPr>
-                        <a:t>不用人工催，系統會在他下次開遊戲時自動再問</a:t>
-                      </a:r>
-                      <a:endParaRPr lang="en-US" sz="1100" dirty="0">
-                        <a:latin typeface="Microsoft JhengHei" charset="0"/>
-                        <a:ea typeface="Microsoft JhengHei" charset="0"/>
-                        <a:cs typeface="Microsoft JhengHei" charset="0"/>
-                      </a:endParaRPr>
-                    </a:p>
-                  </a:txBody>
-                  <a:tcPr marL="91440" marR="91440" marT="45720" marB="45720" anchor="ctr">
-                    <a:lnL w="6350" cap="flat" cmpd="sng" algn="ctr">
-                      <a:solidFill>
-                        <a:srgbClr val="DAD9D6"/>
-                      </a:solidFill>
-                      <a:prstDash val="solid"/>
-                      <a:round/>
-                      <a:headEnd type="none" w="med" len="med"/>
-                      <a:tailEnd type="none" w="med" len="med"/>
-                    </a:lnL>
-                    <a:lnR w="6350" cap="flat" cmpd="sng" algn="ctr">
-                      <a:solidFill>
-                        <a:srgbClr val="DAD9D6"/>
-                      </a:solidFill>
-                      <a:prstDash val="solid"/>
-                      <a:round/>
-                      <a:headEnd type="none" w="med" len="med"/>
-                      <a:tailEnd type="none" w="med" len="med"/>
-                    </a:lnR>
-                    <a:lnT w="6350" cap="flat" cmpd="sng" algn="ctr">
-                      <a:solidFill>
-                        <a:srgbClr val="DAD9D6"/>
-                      </a:solidFill>
-                      <a:prstDash val="solid"/>
-                      <a:round/>
-                      <a:headEnd type="none" w="med" len="med"/>
-                      <a:tailEnd type="none" w="med" len="med"/>
-                    </a:lnT>
-                    <a:lnB w="6350" cap="flat" cmpd="sng" algn="ctr">
-                      <a:solidFill>
-                        <a:srgbClr val="DAD9D6"/>
-                      </a:solidFill>
-                      <a:prstDash val="solid"/>
-                      <a:round/>
-                      <a:headEnd type="none" w="med" len="med"/>
-                      <a:tailEnd type="none" w="med" len="med"/>
-                    </a:lnB>
-                    <a:solidFill>
-                      <a:srgbClr val="FFFFFF"/>
-                    </a:solidFill>
-                  </a:tcPr>
-                </a:tc>
-              </a:tr>
-              <a:tr h="457200">
-                <a:tc>
-                  <a:txBody>
-                    <a:bodyPr/>
-                    <a:lstStyle/>
-                    <a:p>
-                      <a:pPr indent="0" marL="0">
-                        <a:buNone/>
-                      </a:pPr>
-                      <a:r>
-                        <a:rPr lang="en-US" sz="1100" dirty="0">
-                          <a:solidFill>
-                            <a:srgbClr val="3D3935"/>
-                          </a:solidFill>
-                          <a:latin typeface="Microsoft JhengHei" pitchFamily="34" charset="0"/>
-                          <a:ea typeface="Microsoft JhengHei" pitchFamily="34" charset="-122"/>
-                          <a:cs typeface="Microsoft JhengHei" pitchFamily="34" charset="-120"/>
-                        </a:rPr>
-                        <a:t>某等級獎品發完</a:t>
-                      </a:r>
-                      <a:endParaRPr lang="en-US" sz="1100" dirty="0">
-                        <a:latin typeface="Microsoft JhengHei" charset="0"/>
-                        <a:ea typeface="Microsoft JhengHei" charset="0"/>
-                        <a:cs typeface="Microsoft JhengHei" charset="0"/>
-                      </a:endParaRPr>
-                    </a:p>
-                  </a:txBody>
-                  <a:tcPr marL="91440" marR="91440" marT="45720" marB="45720" anchor="ctr">
-                    <a:lnL w="6350" cap="flat" cmpd="sng" algn="ctr">
-                      <a:solidFill>
-                        <a:srgbClr val="DAD9D6"/>
-                      </a:solidFill>
-                      <a:prstDash val="solid"/>
-                      <a:round/>
-                      <a:headEnd type="none" w="med" len="med"/>
-                      <a:tailEnd type="none" w="med" len="med"/>
-                    </a:lnL>
-                    <a:lnR w="6350" cap="flat" cmpd="sng" algn="ctr">
-                      <a:solidFill>
-                        <a:srgbClr val="DAD9D6"/>
-                      </a:solidFill>
-                      <a:prstDash val="solid"/>
-                      <a:round/>
-                      <a:headEnd type="none" w="med" len="med"/>
-                      <a:tailEnd type="none" w="med" len="med"/>
-                    </a:lnR>
-                    <a:lnT w="6350" cap="flat" cmpd="sng" algn="ctr">
-                      <a:solidFill>
-                        <a:srgbClr val="DAD9D6"/>
-                      </a:solidFill>
-                      <a:prstDash val="solid"/>
-                      <a:round/>
-                      <a:headEnd type="none" w="med" len="med"/>
-                      <a:tailEnd type="none" w="med" len="med"/>
-                    </a:lnT>
-                    <a:lnB w="6350" cap="flat" cmpd="sng" algn="ctr">
-                      <a:solidFill>
-                        <a:srgbClr val="DAD9D6"/>
-                      </a:solidFill>
-                      <a:prstDash val="solid"/>
-                      <a:round/>
-                      <a:headEnd type="none" w="med" len="med"/>
-                      <a:tailEnd type="none" w="med" len="med"/>
-                    </a:lnB>
-                    <a:solidFill>
-                      <a:srgbClr val="FFFFFF"/>
-                    </a:solidFill>
-                  </a:tcPr>
-                </a:tc>
-                <a:tc>
-                  <a:txBody>
-                    <a:bodyPr/>
-                    <a:lstStyle/>
-                    <a:p>
-                      <a:pPr indent="0" marL="0">
-                        <a:buNone/>
-                      </a:pPr>
-                      <a:r>
-                        <a:rPr lang="en-US" sz="1100" dirty="0">
-                          <a:solidFill>
-                            <a:srgbClr val="3D3935"/>
-                          </a:solidFill>
-                          <a:latin typeface="Microsoft JhengHei" pitchFamily="34" charset="0"/>
-                          <a:ea typeface="Microsoft JhengHei" pitchFamily="34" charset="-122"/>
-                          <a:cs typeface="Microsoft JhengHei" pitchFamily="34" charset="-120"/>
-                        </a:rPr>
-                        <a:t>客人會抽到銘謝惠顧且不扣幣。要繼續發獎需增加名額</a:t>
-                      </a:r>
-                      <a:endParaRPr lang="en-US" sz="1100" dirty="0">
-                        <a:latin typeface="Microsoft JhengHei" charset="0"/>
-                        <a:ea typeface="Microsoft JhengHei" charset="0"/>
-                        <a:cs typeface="Microsoft JhengHei" charset="0"/>
-                      </a:endParaRPr>
-                    </a:p>
-                  </a:txBody>
-                  <a:tcPr marL="91440" marR="91440" marT="45720" marB="45720" anchor="ctr">
-                    <a:lnL w="6350" cap="flat" cmpd="sng" algn="ctr">
-                      <a:solidFill>
-                        <a:srgbClr val="DAD9D6"/>
-                      </a:solidFill>
-                      <a:prstDash val="solid"/>
-                      <a:round/>
-                      <a:headEnd type="none" w="med" len="med"/>
-                      <a:tailEnd type="none" w="med" len="med"/>
-                    </a:lnL>
-                    <a:lnR w="6350" cap="flat" cmpd="sng" algn="ctr">
-                      <a:solidFill>
-                        <a:srgbClr val="DAD9D6"/>
-                      </a:solidFill>
-                      <a:prstDash val="solid"/>
-                      <a:round/>
-                      <a:headEnd type="none" w="med" len="med"/>
-                      <a:tailEnd type="none" w="med" len="med"/>
-                    </a:lnR>
-                    <a:lnT w="6350" cap="flat" cmpd="sng" algn="ctr">
-                      <a:solidFill>
-                        <a:srgbClr val="DAD9D6"/>
-                      </a:solidFill>
-                      <a:prstDash val="solid"/>
-                      <a:round/>
-                      <a:headEnd type="none" w="med" len="med"/>
-                      <a:tailEnd type="none" w="med" len="med"/>
-                    </a:lnT>
-                    <a:lnB w="6350" cap="flat" cmpd="sng" algn="ctr">
-                      <a:solidFill>
-                        <a:srgbClr val="DAD9D6"/>
-                      </a:solidFill>
-                      <a:prstDash val="solid"/>
-                      <a:round/>
-                      <a:headEnd type="none" w="med" len="med"/>
-                      <a:tailEnd type="none" w="med" len="med"/>
-                    </a:lnB>
-                    <a:solidFill>
-                      <a:srgbClr val="FFFFFF"/>
-                    </a:solidFill>
-                  </a:tcPr>
-                </a:tc>
-              </a:tr>
-              <a:tr h="457200">
-                <a:tc>
-                  <a:txBody>
-                    <a:bodyPr/>
-                    <a:lstStyle/>
-                    <a:p>
-                      <a:pPr indent="0" marL="0">
-                        <a:buNone/>
-                      </a:pPr>
-                      <a:r>
-                        <a:rPr lang="en-US" sz="1100" dirty="0">
-                          <a:solidFill>
-                            <a:srgbClr val="3D3935"/>
-                          </a:solidFill>
-                          <a:latin typeface="Microsoft JhengHei" pitchFamily="34" charset="0"/>
-                          <a:ea typeface="Microsoft JhengHei" pitchFamily="34" charset="-122"/>
-                          <a:cs typeface="Microsoft JhengHei" pitchFamily="34" charset="-120"/>
-                        </a:rPr>
-                        <a:t>懷疑異常大量中獎</a:t>
-                      </a:r>
-                      <a:endParaRPr lang="en-US" sz="1100" dirty="0">
-                        <a:latin typeface="Microsoft JhengHei" charset="0"/>
-                        <a:ea typeface="Microsoft JhengHei" charset="0"/>
-                        <a:cs typeface="Microsoft JhengHei" charset="0"/>
-                      </a:endParaRPr>
-                    </a:p>
-                  </a:txBody>
-                  <a:tcPr marL="91440" marR="91440" marT="45720" marB="45720" anchor="ctr">
-                    <a:lnL w="6350" cap="flat" cmpd="sng" algn="ctr">
-                      <a:solidFill>
-                        <a:srgbClr val="DAD9D6"/>
-                      </a:solidFill>
-                      <a:prstDash val="solid"/>
-                      <a:round/>
-                      <a:headEnd type="none" w="med" len="med"/>
-                      <a:tailEnd type="none" w="med" len="med"/>
-                    </a:lnL>
-                    <a:lnR w="6350" cap="flat" cmpd="sng" algn="ctr">
-                      <a:solidFill>
-                        <a:srgbClr val="DAD9D6"/>
-                      </a:solidFill>
-                      <a:prstDash val="solid"/>
-                      <a:round/>
-                      <a:headEnd type="none" w="med" len="med"/>
-                      <a:tailEnd type="none" w="med" len="med"/>
-                    </a:lnR>
-                    <a:lnT w="6350" cap="flat" cmpd="sng" algn="ctr">
-                      <a:solidFill>
-                        <a:srgbClr val="DAD9D6"/>
-                      </a:solidFill>
-                      <a:prstDash val="solid"/>
-                      <a:round/>
-                      <a:headEnd type="none" w="med" len="med"/>
-                      <a:tailEnd type="none" w="med" len="med"/>
-                    </a:lnT>
-                    <a:lnB w="6350" cap="flat" cmpd="sng" algn="ctr">
-                      <a:solidFill>
-                        <a:srgbClr val="DAD9D6"/>
-                      </a:solidFill>
-                      <a:prstDash val="solid"/>
-                      <a:round/>
-                      <a:headEnd type="none" w="med" len="med"/>
-                      <a:tailEnd type="none" w="med" len="med"/>
-                    </a:lnB>
-                    <a:solidFill>
-                      <a:srgbClr val="FFFFFF"/>
-                    </a:solidFill>
-                  </a:tcPr>
-                </a:tc>
-                <a:tc>
-                  <a:txBody>
-                    <a:bodyPr/>
-                    <a:lstStyle/>
-                    <a:p>
-                      <a:pPr indent="0" marL="0">
-                        <a:buNone/>
-                      </a:pPr>
-                      <a:r>
-                        <a:rPr lang="en-US" sz="1100" dirty="0">
-                          <a:solidFill>
-                            <a:srgbClr val="3D3935"/>
-                          </a:solidFill>
-                          <a:latin typeface="Microsoft JhengHei" pitchFamily="34" charset="0"/>
-                          <a:ea typeface="Microsoft JhengHei" pitchFamily="34" charset="-122"/>
-                          <a:cs typeface="Microsoft JhengHei" pitchFamily="34" charset="-120"/>
-                        </a:rPr>
-                        <a:t>查同一 LINE UserId 的中獎筆數。洲遊幣每人上限 8 枚，正常不會異常</a:t>
-                      </a:r>
-                      <a:endParaRPr lang="en-US" sz="1100" dirty="0">
-                        <a:latin typeface="Microsoft JhengHei" charset="0"/>
-                        <a:ea typeface="Microsoft JhengHei" charset="0"/>
-                        <a:cs typeface="Microsoft JhengHei" charset="0"/>
-                      </a:endParaRPr>
-                    </a:p>
-                  </a:txBody>
-                  <a:tcPr marL="91440" marR="91440" marT="45720" marB="45720" anchor="ctr">
-                    <a:lnL w="6350" cap="flat" cmpd="sng" algn="ctr">
-                      <a:solidFill>
-                        <a:srgbClr val="DAD9D6"/>
-                      </a:solidFill>
-                      <a:prstDash val="solid"/>
-                      <a:round/>
-                      <a:headEnd type="none" w="med" len="med"/>
-                      <a:tailEnd type="none" w="med" len="med"/>
-                    </a:lnL>
-                    <a:lnR w="6350" cap="flat" cmpd="sng" algn="ctr">
-                      <a:solidFill>
-                        <a:srgbClr val="DAD9D6"/>
-                      </a:solidFill>
-                      <a:prstDash val="solid"/>
-                      <a:round/>
-                      <a:headEnd type="none" w="med" len="med"/>
-                      <a:tailEnd type="none" w="med" len="med"/>
-                    </a:lnR>
-                    <a:lnT w="6350" cap="flat" cmpd="sng" algn="ctr">
-                      <a:solidFill>
-                        <a:srgbClr val="DAD9D6"/>
-                      </a:solidFill>
-                      <a:prstDash val="solid"/>
-                      <a:round/>
-                      <a:headEnd type="none" w="med" len="med"/>
-                      <a:tailEnd type="none" w="med" len="med"/>
-                    </a:lnT>
-                    <a:lnB w="6350" cap="flat" cmpd="sng" algn="ctr">
-                      <a:solidFill>
-                        <a:srgbClr val="DAD9D6"/>
-                      </a:solidFill>
-                      <a:prstDash val="solid"/>
-                      <a:round/>
-                      <a:headEnd type="none" w="med" len="med"/>
-                      <a:tailEnd type="none" w="med" len="med"/>
-                    </a:lnB>
-                    <a:solidFill>
-                      <a:srgbClr val="FFFFFF"/>
-                    </a:solidFill>
-                  </a:tcPr>
-                </a:tc>
-              </a:tr>
-              <a:tr h="457200">
-                <a:tc>
-                  <a:txBody>
-                    <a:bodyPr/>
-                    <a:lstStyle/>
-                    <a:p>
-                      <a:pPr indent="0" marL="0">
-                        <a:buNone/>
-                      </a:pPr>
-                      <a:r>
-                        <a:rPr lang="en-US" sz="1100" dirty="0">
-                          <a:solidFill>
-                            <a:srgbClr val="3D3935"/>
-                          </a:solidFill>
-                          <a:latin typeface="Microsoft JhengHei" pitchFamily="34" charset="0"/>
-                          <a:ea typeface="Microsoft JhengHei" pitchFamily="34" charset="-122"/>
-                          <a:cs typeface="Microsoft JhengHei" pitchFamily="34" charset="-120"/>
-                        </a:rPr>
-                        <a:t>系統整體異常</a:t>
-                      </a:r>
-                      <a:endParaRPr lang="en-US" sz="1100" dirty="0">
-                        <a:latin typeface="Microsoft JhengHei" charset="0"/>
-                        <a:ea typeface="Microsoft JhengHei" charset="0"/>
-                        <a:cs typeface="Microsoft JhengHei" charset="0"/>
-                      </a:endParaRPr>
-                    </a:p>
-                  </a:txBody>
-                  <a:tcPr marL="91440" marR="91440" marT="45720" marB="45720" anchor="ctr">
-                    <a:lnL w="6350" cap="flat" cmpd="sng" algn="ctr">
-                      <a:solidFill>
-                        <a:srgbClr val="DAD9D6"/>
-                      </a:solidFill>
-                      <a:prstDash val="solid"/>
-                      <a:round/>
-                      <a:headEnd type="none" w="med" len="med"/>
-                      <a:tailEnd type="none" w="med" len="med"/>
-                    </a:lnL>
-                    <a:lnR w="6350" cap="flat" cmpd="sng" algn="ctr">
-                      <a:solidFill>
-                        <a:srgbClr val="DAD9D6"/>
-                      </a:solidFill>
-                      <a:prstDash val="solid"/>
-                      <a:round/>
-                      <a:headEnd type="none" w="med" len="med"/>
-                      <a:tailEnd type="none" w="med" len="med"/>
-                    </a:lnR>
-                    <a:lnT w="6350" cap="flat" cmpd="sng" algn="ctr">
-                      <a:solidFill>
-                        <a:srgbClr val="DAD9D6"/>
-                      </a:solidFill>
-                      <a:prstDash val="solid"/>
-                      <a:round/>
-                      <a:headEnd type="none" w="med" len="med"/>
-                      <a:tailEnd type="none" w="med" len="med"/>
-                    </a:lnT>
-                    <a:lnB w="6350" cap="flat" cmpd="sng" algn="ctr">
-                      <a:solidFill>
-                        <a:srgbClr val="DAD9D6"/>
-                      </a:solidFill>
-                      <a:prstDash val="solid"/>
-                      <a:round/>
-                      <a:headEnd type="none" w="med" len="med"/>
-                      <a:tailEnd type="none" w="med" len="med"/>
-                    </a:lnB>
-                    <a:solidFill>
-                      <a:srgbClr val="FFFFFF"/>
-                    </a:solidFill>
-                  </a:tcPr>
-                </a:tc>
-                <a:tc>
-                  <a:txBody>
-                    <a:bodyPr/>
-                    <a:lstStyle/>
-                    <a:p>
-                      <a:pPr indent="0" marL="0">
-                        <a:buNone/>
-                      </a:pPr>
-                      <a:r>
-                        <a:rPr lang="en-US" sz="1100" dirty="0">
-                          <a:solidFill>
-                            <a:srgbClr val="3D3935"/>
-                          </a:solidFill>
-                          <a:latin typeface="Microsoft JhengHei" pitchFamily="34" charset="0"/>
-                          <a:ea typeface="Microsoft JhengHei" pitchFamily="34" charset="-122"/>
-                          <a:cs typeface="Microsoft JhengHei" pitchFamily="34" charset="-120"/>
-                        </a:rPr>
-                        <a:t>打 /api/health?deep=1 看 db 與 LINE token 是否有效</a:t>
-                      </a:r>
-                      <a:endParaRPr lang="en-US" sz="1100" dirty="0">
-                        <a:latin typeface="Microsoft JhengHei" charset="0"/>
-                        <a:ea typeface="Microsoft JhengHei" charset="0"/>
-                        <a:cs typeface="Microsoft JhengHei" charset="0"/>
-                      </a:endParaRPr>
-                    </a:p>
-                  </a:txBody>
-                  <a:tcPr marL="91440" marR="91440" marT="45720" marB="45720" anchor="ctr">
-                    <a:lnL w="6350" cap="flat" cmpd="sng" algn="ctr">
-                      <a:solidFill>
-                        <a:srgbClr val="DAD9D6"/>
-                      </a:solidFill>
-                      <a:prstDash val="solid"/>
-                      <a:round/>
-                      <a:headEnd type="none" w="med" len="med"/>
-                      <a:tailEnd type="none" w="med" len="med"/>
-                    </a:lnL>
-                    <a:lnR w="6350" cap="flat" cmpd="sng" algn="ctr">
-                      <a:solidFill>
-                        <a:srgbClr val="DAD9D6"/>
-                      </a:solidFill>
-                      <a:prstDash val="solid"/>
-                      <a:round/>
-                      <a:headEnd type="none" w="med" len="med"/>
-                      <a:tailEnd type="none" w="med" len="med"/>
-                    </a:lnR>
-                    <a:lnT w="6350" cap="flat" cmpd="sng" algn="ctr">
-                      <a:solidFill>
-                        <a:srgbClr val="DAD9D6"/>
-                      </a:solidFill>
-                      <a:prstDash val="solid"/>
-                      <a:round/>
-                      <a:headEnd type="none" w="med" len="med"/>
-                      <a:tailEnd type="none" w="med" len="med"/>
-                    </a:lnT>
-                    <a:lnB w="6350" cap="flat" cmpd="sng" algn="ctr">
-                      <a:solidFill>
-                        <a:srgbClr val="DAD9D6"/>
-                      </a:solidFill>
-                      <a:prstDash val="solid"/>
-                      <a:round/>
-                      <a:headEnd type="none" w="med" len="med"/>
-                      <a:tailEnd type="none" w="med" len="med"/>
-                    </a:lnB>
-                    <a:solidFill>
-                      <a:srgbClr val="FFFFFF"/>
-                    </a:solidFill>
-                  </a:tcPr>
-                </a:tc>
-              </a:tr>
-            </a:tbl>
-          </a:graphicData>
-        </a:graphic>
-      </p:graphicFrame>
-    </p:spTree>
-  </p:cSld>
-  <p:clrMapOvr>
-    <a:masterClrMapping/>
-  </p:clrMapOvr>
-</p:sld>
-</file>
-
 <file path=ppt/theme/theme1.xml><?xml version="1.0" encoding="utf-8"?>
 <a:theme xmlns:a="http://schemas.openxmlformats.org/drawingml/2006/main" name="Office Theme">
   <a:themeElements>
